--- a/Documentation/Core Architecture.pptx
+++ b/Documentation/Core Architecture.pptx
@@ -212,7 +212,7 @@
           <a:p>
             <a:fld id="{D0E2DD2C-27F7-4F93-96E8-CD28AD9267D9}" type="datetimeFigureOut">
               <a:rPr lang="en-US" smtClean="0"/>
-              <a:t>6/18/2025</a:t>
+              <a:t>6/23/2025</a:t>
             </a:fld>
             <a:endParaRPr lang="en-US"/>
           </a:p>
@@ -545,6 +545,90 @@
           <a:p>
             <a:fld id="{583D7F03-7197-42E4-9778-D52D335F305D}" type="slidenum">
               <a:rPr lang="en-US" smtClean="0"/>
+              <a:t>3</a:t>
+            </a:fld>
+            <a:endParaRPr lang="en-US"/>
+          </a:p>
+        </p:txBody>
+      </p:sp>
+    </p:spTree>
+    <p:extLst>
+      <p:ext uri="{BB962C8B-B14F-4D97-AF65-F5344CB8AC3E}">
+        <p14:creationId xmlns:p14="http://schemas.microsoft.com/office/powerpoint/2010/main" val="1833088327"/>
+      </p:ext>
+    </p:extLst>
+  </p:cSld>
+  <p:clrMapOvr>
+    <a:masterClrMapping/>
+  </p:clrMapOvr>
+</p:notes>
+</file>
+
+<file path=ppt/notesSlides/notesSlide2.xml><?xml version="1.0" encoding="utf-8"?>
+<p:notes xmlns:a="http://schemas.openxmlformats.org/drawingml/2006/main" xmlns:r="http://schemas.openxmlformats.org/officeDocument/2006/relationships" xmlns:p="http://schemas.openxmlformats.org/presentationml/2006/main">
+  <p:cSld>
+    <p:spTree>
+      <p:nvGrpSpPr>
+        <p:cNvPr id="1" name=""/>
+        <p:cNvGrpSpPr/>
+        <p:nvPr/>
+      </p:nvGrpSpPr>
+      <p:grpSpPr>
+        <a:xfrm>
+          <a:off x="0" y="0"/>
+          <a:ext cx="0" cy="0"/>
+          <a:chOff x="0" y="0"/>
+          <a:chExt cx="0" cy="0"/>
+        </a:xfrm>
+      </p:grpSpPr>
+      <p:sp>
+        <p:nvSpPr>
+          <p:cNvPr id="2" name="Symbol zastępczy obrazu slajdu 1"/>
+          <p:cNvSpPr>
+            <a:spLocks noGrp="1" noRot="1" noChangeAspect="1"/>
+          </p:cNvSpPr>
+          <p:nvPr>
+            <p:ph type="sldImg"/>
+          </p:nvPr>
+        </p:nvSpPr>
+        <p:spPr/>
+      </p:sp>
+      <p:sp>
+        <p:nvSpPr>
+          <p:cNvPr id="3" name="Symbol zastępczy notatek 2"/>
+          <p:cNvSpPr>
+            <a:spLocks noGrp="1"/>
+          </p:cNvSpPr>
+          <p:nvPr>
+            <p:ph type="body" idx="1"/>
+          </p:nvPr>
+        </p:nvSpPr>
+        <p:spPr/>
+        <p:txBody>
+          <a:bodyPr/>
+          <a:lstStyle/>
+          <a:p>
+            <a:endParaRPr lang="en-US" dirty="0"/>
+          </a:p>
+        </p:txBody>
+      </p:sp>
+      <p:sp>
+        <p:nvSpPr>
+          <p:cNvPr id="4" name="Symbol zastępczy numeru slajdu 3"/>
+          <p:cNvSpPr>
+            <a:spLocks noGrp="1"/>
+          </p:cNvSpPr>
+          <p:nvPr>
+            <p:ph type="sldNum" sz="quarter" idx="5"/>
+          </p:nvPr>
+        </p:nvSpPr>
+        <p:spPr/>
+        <p:txBody>
+          <a:bodyPr/>
+          <a:lstStyle/>
+          <a:p>
+            <a:fld id="{583D7F03-7197-42E4-9778-D52D335F305D}" type="slidenum">
+              <a:rPr lang="en-US" smtClean="0"/>
               <a:t>4</a:t>
             </a:fld>
             <a:endParaRPr lang="en-US"/>
@@ -711,7 +795,7 @@
           <a:p>
             <a:fld id="{783DC7D5-4D76-4679-A391-31CBAFA90932}" type="datetimeFigureOut">
               <a:rPr lang="en-US" smtClean="0"/>
-              <a:t>6/18/2025</a:t>
+              <a:t>6/23/2025</a:t>
             </a:fld>
             <a:endParaRPr lang="en-US"/>
           </a:p>
@@ -909,7 +993,7 @@
           <a:p>
             <a:fld id="{783DC7D5-4D76-4679-A391-31CBAFA90932}" type="datetimeFigureOut">
               <a:rPr lang="en-US" smtClean="0"/>
-              <a:t>6/18/2025</a:t>
+              <a:t>6/23/2025</a:t>
             </a:fld>
             <a:endParaRPr lang="en-US"/>
           </a:p>
@@ -1117,7 +1201,7 @@
           <a:p>
             <a:fld id="{783DC7D5-4D76-4679-A391-31CBAFA90932}" type="datetimeFigureOut">
               <a:rPr lang="en-US" smtClean="0"/>
-              <a:t>6/18/2025</a:t>
+              <a:t>6/23/2025</a:t>
             </a:fld>
             <a:endParaRPr lang="en-US"/>
           </a:p>
@@ -1315,7 +1399,7 @@
           <a:p>
             <a:fld id="{783DC7D5-4D76-4679-A391-31CBAFA90932}" type="datetimeFigureOut">
               <a:rPr lang="en-US" smtClean="0"/>
-              <a:t>6/18/2025</a:t>
+              <a:t>6/23/2025</a:t>
             </a:fld>
             <a:endParaRPr lang="en-US"/>
           </a:p>
@@ -1590,7 +1674,7 @@
           <a:p>
             <a:fld id="{783DC7D5-4D76-4679-A391-31CBAFA90932}" type="datetimeFigureOut">
               <a:rPr lang="en-US" smtClean="0"/>
-              <a:t>6/18/2025</a:t>
+              <a:t>6/23/2025</a:t>
             </a:fld>
             <a:endParaRPr lang="en-US"/>
           </a:p>
@@ -1855,7 +1939,7 @@
           <a:p>
             <a:fld id="{783DC7D5-4D76-4679-A391-31CBAFA90932}" type="datetimeFigureOut">
               <a:rPr lang="en-US" smtClean="0"/>
-              <a:t>6/18/2025</a:t>
+              <a:t>6/23/2025</a:t>
             </a:fld>
             <a:endParaRPr lang="en-US"/>
           </a:p>
@@ -2267,7 +2351,7 @@
           <a:p>
             <a:fld id="{783DC7D5-4D76-4679-A391-31CBAFA90932}" type="datetimeFigureOut">
               <a:rPr lang="en-US" smtClean="0"/>
-              <a:t>6/18/2025</a:t>
+              <a:t>6/23/2025</a:t>
             </a:fld>
             <a:endParaRPr lang="en-US"/>
           </a:p>
@@ -2408,7 +2492,7 @@
           <a:p>
             <a:fld id="{783DC7D5-4D76-4679-A391-31CBAFA90932}" type="datetimeFigureOut">
               <a:rPr lang="en-US" smtClean="0"/>
-              <a:t>6/18/2025</a:t>
+              <a:t>6/23/2025</a:t>
             </a:fld>
             <a:endParaRPr lang="en-US"/>
           </a:p>
@@ -2521,7 +2605,7 @@
           <a:p>
             <a:fld id="{783DC7D5-4D76-4679-A391-31CBAFA90932}" type="datetimeFigureOut">
               <a:rPr lang="en-US" smtClean="0"/>
-              <a:t>6/18/2025</a:t>
+              <a:t>6/23/2025</a:t>
             </a:fld>
             <a:endParaRPr lang="en-US"/>
           </a:p>
@@ -2832,7 +2916,7 @@
           <a:p>
             <a:fld id="{783DC7D5-4D76-4679-A391-31CBAFA90932}" type="datetimeFigureOut">
               <a:rPr lang="en-US" smtClean="0"/>
-              <a:t>6/18/2025</a:t>
+              <a:t>6/23/2025</a:t>
             </a:fld>
             <a:endParaRPr lang="en-US"/>
           </a:p>
@@ -3120,7 +3204,7 @@
           <a:p>
             <a:fld id="{783DC7D5-4D76-4679-A391-31CBAFA90932}" type="datetimeFigureOut">
               <a:rPr lang="en-US" smtClean="0"/>
-              <a:t>6/18/2025</a:t>
+              <a:t>6/23/2025</a:t>
             </a:fld>
             <a:endParaRPr lang="en-US"/>
           </a:p>
@@ -3361,7 +3445,7 @@
           <a:p>
             <a:fld id="{783DC7D5-4D76-4679-A391-31CBAFA90932}" type="datetimeFigureOut">
               <a:rPr lang="en-US" smtClean="0"/>
-              <a:t>6/18/2025</a:t>
+              <a:t>6/23/2025</a:t>
             </a:fld>
             <a:endParaRPr lang="en-US"/>
           </a:p>
@@ -4589,9 +4673,1139 @@
             <a:pPr algn="ctr"/>
             <a:r>
               <a:rPr lang="en-US" sz="2000" dirty="0"/>
-              <a:t>Layers Stack</a:t>
+              <a:t>Core Layers</a:t>
             </a:r>
             <a:endParaRPr lang="en-US" sz="1400" dirty="0"/>
+          </a:p>
+        </p:txBody>
+      </p:sp>
+      <p:sp>
+        <p:nvSpPr>
+          <p:cNvPr id="2" name="Prostokąt: zaokrąglone rogi 1">
+            <a:extLst>
+              <a:ext uri="{FF2B5EF4-FFF2-40B4-BE49-F238E27FC236}">
+                <a16:creationId xmlns:a16="http://schemas.microsoft.com/office/drawing/2014/main" id="{366E6C57-AADA-5927-C771-0418173331A3}"/>
+              </a:ext>
+            </a:extLst>
+          </p:cNvPr>
+          <p:cNvSpPr/>
+          <p:nvPr/>
+        </p:nvSpPr>
+        <p:spPr>
+          <a:xfrm>
+            <a:off x="478972" y="4802157"/>
+            <a:ext cx="11234056" cy="1010816"/>
+          </a:xfrm>
+          <a:prstGeom prst="roundRect">
+            <a:avLst/>
+          </a:prstGeom>
+        </p:spPr>
+        <p:style>
+          <a:lnRef idx="1">
+            <a:schemeClr val="accent1"/>
+          </a:lnRef>
+          <a:fillRef idx="2">
+            <a:schemeClr val="accent1"/>
+          </a:fillRef>
+          <a:effectRef idx="1">
+            <a:schemeClr val="accent1"/>
+          </a:effectRef>
+          <a:fontRef idx="minor">
+            <a:schemeClr val="dk1"/>
+          </a:fontRef>
+        </p:style>
+        <p:txBody>
+          <a:bodyPr rtlCol="0" anchor="t"/>
+          <a:lstStyle/>
+          <a:p>
+            <a:pPr algn="ctr"/>
+            <a:r>
+              <a:rPr lang="en-US" sz="1600" dirty="0"/>
+              <a:t>Foundation Layer</a:t>
+            </a:r>
+          </a:p>
+        </p:txBody>
+      </p:sp>
+      <p:sp>
+        <p:nvSpPr>
+          <p:cNvPr id="3" name="Prostokąt: zaokrąglone rogi 2">
+            <a:extLst>
+              <a:ext uri="{FF2B5EF4-FFF2-40B4-BE49-F238E27FC236}">
+                <a16:creationId xmlns:a16="http://schemas.microsoft.com/office/drawing/2014/main" id="{B8F3FBD3-C67B-9997-BA90-8A3F07431D67}"/>
+              </a:ext>
+            </a:extLst>
+          </p:cNvPr>
+          <p:cNvSpPr/>
+          <p:nvPr/>
+        </p:nvSpPr>
+        <p:spPr>
+          <a:xfrm>
+            <a:off x="1184964" y="5231361"/>
+            <a:ext cx="1138323" cy="454087"/>
+          </a:xfrm>
+          <a:prstGeom prst="roundRect">
+            <a:avLst/>
+          </a:prstGeom>
+        </p:spPr>
+        <p:style>
+          <a:lnRef idx="0">
+            <a:schemeClr val="accent1"/>
+          </a:lnRef>
+          <a:fillRef idx="3">
+            <a:schemeClr val="accent1"/>
+          </a:fillRef>
+          <a:effectRef idx="3">
+            <a:schemeClr val="accent1"/>
+          </a:effectRef>
+          <a:fontRef idx="minor">
+            <a:schemeClr val="lt1"/>
+          </a:fontRef>
+        </p:style>
+        <p:txBody>
+          <a:bodyPr rtlCol="0" anchor="ctr"/>
+          <a:lstStyle/>
+          <a:p>
+            <a:pPr algn="ctr"/>
+            <a:r>
+              <a:rPr lang="en-US" sz="1400" dirty="0"/>
+              <a:t>Logging</a:t>
+            </a:r>
+          </a:p>
+        </p:txBody>
+      </p:sp>
+      <p:sp>
+        <p:nvSpPr>
+          <p:cNvPr id="5" name="Prostokąt: zaokrąglone rogi 4">
+            <a:extLst>
+              <a:ext uri="{FF2B5EF4-FFF2-40B4-BE49-F238E27FC236}">
+                <a16:creationId xmlns:a16="http://schemas.microsoft.com/office/drawing/2014/main" id="{64876DB2-099D-C479-C890-EC75D6AEF45C}"/>
+              </a:ext>
+            </a:extLst>
+          </p:cNvPr>
+          <p:cNvSpPr/>
+          <p:nvPr/>
+        </p:nvSpPr>
+        <p:spPr>
+          <a:xfrm>
+            <a:off x="6395214" y="5231362"/>
+            <a:ext cx="1138323" cy="454087"/>
+          </a:xfrm>
+          <a:prstGeom prst="roundRect">
+            <a:avLst/>
+          </a:prstGeom>
+        </p:spPr>
+        <p:style>
+          <a:lnRef idx="0">
+            <a:schemeClr val="accent1"/>
+          </a:lnRef>
+          <a:fillRef idx="3">
+            <a:schemeClr val="accent1"/>
+          </a:fillRef>
+          <a:effectRef idx="3">
+            <a:schemeClr val="accent1"/>
+          </a:effectRef>
+          <a:fontRef idx="minor">
+            <a:schemeClr val="lt1"/>
+          </a:fontRef>
+        </p:style>
+        <p:txBody>
+          <a:bodyPr rtlCol="0" anchor="ctr"/>
+          <a:lstStyle/>
+          <a:p>
+            <a:pPr algn="ctr"/>
+            <a:r>
+              <a:rPr lang="en-US" sz="1400" dirty="0"/>
+              <a:t>Allocators</a:t>
+            </a:r>
+          </a:p>
+        </p:txBody>
+      </p:sp>
+      <p:sp>
+        <p:nvSpPr>
+          <p:cNvPr id="6" name="Prostokąt: zaokrąglone rogi 5">
+            <a:extLst>
+              <a:ext uri="{FF2B5EF4-FFF2-40B4-BE49-F238E27FC236}">
+                <a16:creationId xmlns:a16="http://schemas.microsoft.com/office/drawing/2014/main" id="{11069426-63F8-357C-C80D-FDF076D7061D}"/>
+              </a:ext>
+            </a:extLst>
+          </p:cNvPr>
+          <p:cNvSpPr/>
+          <p:nvPr/>
+        </p:nvSpPr>
+        <p:spPr>
+          <a:xfrm>
+            <a:off x="478972" y="3211287"/>
+            <a:ext cx="11234056" cy="1010816"/>
+          </a:xfrm>
+          <a:prstGeom prst="roundRect">
+            <a:avLst/>
+          </a:prstGeom>
+        </p:spPr>
+        <p:style>
+          <a:lnRef idx="1">
+            <a:schemeClr val="accent2"/>
+          </a:lnRef>
+          <a:fillRef idx="2">
+            <a:schemeClr val="accent2"/>
+          </a:fillRef>
+          <a:effectRef idx="1">
+            <a:schemeClr val="accent2"/>
+          </a:effectRef>
+          <a:fontRef idx="minor">
+            <a:schemeClr val="dk1"/>
+          </a:fontRef>
+        </p:style>
+        <p:txBody>
+          <a:bodyPr rtlCol="0" anchor="t"/>
+          <a:lstStyle/>
+          <a:p>
+            <a:pPr algn="ctr"/>
+            <a:r>
+              <a:rPr lang="en-US" sz="1600" dirty="0"/>
+              <a:t>Platform Layer</a:t>
+            </a:r>
+          </a:p>
+        </p:txBody>
+      </p:sp>
+      <p:sp>
+        <p:nvSpPr>
+          <p:cNvPr id="7" name="Prostokąt: zaokrąglone rogi 6">
+            <a:extLst>
+              <a:ext uri="{FF2B5EF4-FFF2-40B4-BE49-F238E27FC236}">
+                <a16:creationId xmlns:a16="http://schemas.microsoft.com/office/drawing/2014/main" id="{350DFB50-7101-399F-75C8-04B0051F65A4}"/>
+              </a:ext>
+            </a:extLst>
+          </p:cNvPr>
+          <p:cNvSpPr/>
+          <p:nvPr/>
+        </p:nvSpPr>
+        <p:spPr>
+          <a:xfrm>
+            <a:off x="615803" y="3646714"/>
+            <a:ext cx="1138323" cy="454087"/>
+          </a:xfrm>
+          <a:prstGeom prst="roundRect">
+            <a:avLst/>
+          </a:prstGeom>
+        </p:spPr>
+        <p:style>
+          <a:lnRef idx="0">
+            <a:schemeClr val="accent2"/>
+          </a:lnRef>
+          <a:fillRef idx="3">
+            <a:schemeClr val="accent2"/>
+          </a:fillRef>
+          <a:effectRef idx="3">
+            <a:schemeClr val="accent2"/>
+          </a:effectRef>
+          <a:fontRef idx="minor">
+            <a:schemeClr val="lt1"/>
+          </a:fontRef>
+        </p:style>
+        <p:txBody>
+          <a:bodyPr rtlCol="0" anchor="ctr"/>
+          <a:lstStyle/>
+          <a:p>
+            <a:pPr algn="ctr"/>
+            <a:r>
+              <a:rPr lang="en-US" sz="1400" dirty="0"/>
+              <a:t>File I/O</a:t>
+            </a:r>
+          </a:p>
+        </p:txBody>
+      </p:sp>
+      <p:sp>
+        <p:nvSpPr>
+          <p:cNvPr id="8" name="Prostokąt: zaokrąglone rogi 7">
+            <a:extLst>
+              <a:ext uri="{FF2B5EF4-FFF2-40B4-BE49-F238E27FC236}">
+                <a16:creationId xmlns:a16="http://schemas.microsoft.com/office/drawing/2014/main" id="{DE36A00E-7727-E967-0154-88CE0530846F}"/>
+              </a:ext>
+            </a:extLst>
+          </p:cNvPr>
+          <p:cNvSpPr/>
+          <p:nvPr/>
+        </p:nvSpPr>
+        <p:spPr>
+          <a:xfrm>
+            <a:off x="2252815" y="3646716"/>
+            <a:ext cx="1138323" cy="454087"/>
+          </a:xfrm>
+          <a:prstGeom prst="roundRect">
+            <a:avLst/>
+          </a:prstGeom>
+        </p:spPr>
+        <p:style>
+          <a:lnRef idx="0">
+            <a:schemeClr val="accent2"/>
+          </a:lnRef>
+          <a:fillRef idx="3">
+            <a:schemeClr val="accent2"/>
+          </a:fillRef>
+          <a:effectRef idx="3">
+            <a:schemeClr val="accent2"/>
+          </a:effectRef>
+          <a:fontRef idx="minor">
+            <a:schemeClr val="lt1"/>
+          </a:fontRef>
+        </p:style>
+        <p:txBody>
+          <a:bodyPr rtlCol="0" anchor="ctr"/>
+          <a:lstStyle/>
+          <a:p>
+            <a:pPr algn="ctr"/>
+            <a:r>
+              <a:rPr lang="en-US" sz="1400" dirty="0"/>
+              <a:t>Platform Detection</a:t>
+            </a:r>
+          </a:p>
+        </p:txBody>
+      </p:sp>
+      <p:sp>
+        <p:nvSpPr>
+          <p:cNvPr id="9" name="Prostokąt: zaokrąglone rogi 8">
+            <a:extLst>
+              <a:ext uri="{FF2B5EF4-FFF2-40B4-BE49-F238E27FC236}">
+                <a16:creationId xmlns:a16="http://schemas.microsoft.com/office/drawing/2014/main" id="{90823743-E95B-9868-185B-A9E30D97783F}"/>
+              </a:ext>
+            </a:extLst>
+          </p:cNvPr>
+          <p:cNvSpPr/>
+          <p:nvPr/>
+        </p:nvSpPr>
+        <p:spPr>
+          <a:xfrm>
+            <a:off x="8131964" y="5231361"/>
+            <a:ext cx="1138323" cy="454087"/>
+          </a:xfrm>
+          <a:prstGeom prst="roundRect">
+            <a:avLst/>
+          </a:prstGeom>
+        </p:spPr>
+        <p:style>
+          <a:lnRef idx="0">
+            <a:schemeClr val="accent1"/>
+          </a:lnRef>
+          <a:fillRef idx="3">
+            <a:schemeClr val="accent1"/>
+          </a:fillRef>
+          <a:effectRef idx="3">
+            <a:schemeClr val="accent1"/>
+          </a:effectRef>
+          <a:fontRef idx="minor">
+            <a:schemeClr val="lt1"/>
+          </a:fontRef>
+        </p:style>
+        <p:txBody>
+          <a:bodyPr rtlCol="0" anchor="ctr"/>
+          <a:lstStyle/>
+          <a:p>
+            <a:pPr algn="ctr"/>
+            <a:r>
+              <a:rPr lang="en-US" sz="1400" dirty="0"/>
+              <a:t>Assertions</a:t>
+            </a:r>
+          </a:p>
+        </p:txBody>
+      </p:sp>
+      <p:sp>
+        <p:nvSpPr>
+          <p:cNvPr id="10" name="Prostokąt: zaokrąglone rogi 9">
+            <a:extLst>
+              <a:ext uri="{FF2B5EF4-FFF2-40B4-BE49-F238E27FC236}">
+                <a16:creationId xmlns:a16="http://schemas.microsoft.com/office/drawing/2014/main" id="{8E4259F7-30F6-9A1C-374E-AFE8677F31B0}"/>
+              </a:ext>
+            </a:extLst>
+          </p:cNvPr>
+          <p:cNvSpPr/>
+          <p:nvPr/>
+        </p:nvSpPr>
+        <p:spPr>
+          <a:xfrm>
+            <a:off x="9868712" y="5231360"/>
+            <a:ext cx="1138323" cy="454087"/>
+          </a:xfrm>
+          <a:prstGeom prst="roundRect">
+            <a:avLst/>
+          </a:prstGeom>
+        </p:spPr>
+        <p:style>
+          <a:lnRef idx="0">
+            <a:schemeClr val="accent1"/>
+          </a:lnRef>
+          <a:fillRef idx="3">
+            <a:schemeClr val="accent1"/>
+          </a:fillRef>
+          <a:effectRef idx="3">
+            <a:schemeClr val="accent1"/>
+          </a:effectRef>
+          <a:fontRef idx="minor">
+            <a:schemeClr val="lt1"/>
+          </a:fontRef>
+        </p:style>
+        <p:txBody>
+          <a:bodyPr rtlCol="0" anchor="ctr"/>
+          <a:lstStyle/>
+          <a:p>
+            <a:pPr algn="ctr"/>
+            <a:r>
+              <a:rPr lang="en-US" sz="1400" dirty="0"/>
+              <a:t>Profiling</a:t>
+            </a:r>
+          </a:p>
+        </p:txBody>
+      </p:sp>
+      <p:sp>
+        <p:nvSpPr>
+          <p:cNvPr id="11" name="Prostokąt: zaokrąglone rogi 10">
+            <a:extLst>
+              <a:ext uri="{FF2B5EF4-FFF2-40B4-BE49-F238E27FC236}">
+                <a16:creationId xmlns:a16="http://schemas.microsoft.com/office/drawing/2014/main" id="{84511EE8-E4AA-4571-7F30-6EC9B884B0E5}"/>
+              </a:ext>
+            </a:extLst>
+          </p:cNvPr>
+          <p:cNvSpPr/>
+          <p:nvPr/>
+        </p:nvSpPr>
+        <p:spPr>
+          <a:xfrm>
+            <a:off x="3889827" y="3629613"/>
+            <a:ext cx="1138323" cy="454087"/>
+          </a:xfrm>
+          <a:prstGeom prst="roundRect">
+            <a:avLst/>
+          </a:prstGeom>
+        </p:spPr>
+        <p:style>
+          <a:lnRef idx="0">
+            <a:schemeClr val="accent2"/>
+          </a:lnRef>
+          <a:fillRef idx="3">
+            <a:schemeClr val="accent2"/>
+          </a:fillRef>
+          <a:effectRef idx="3">
+            <a:schemeClr val="accent2"/>
+          </a:effectRef>
+          <a:fontRef idx="minor">
+            <a:schemeClr val="lt1"/>
+          </a:fontRef>
+        </p:style>
+        <p:txBody>
+          <a:bodyPr rtlCol="0" anchor="ctr"/>
+          <a:lstStyle/>
+          <a:p>
+            <a:pPr algn="ctr"/>
+            <a:r>
+              <a:rPr lang="en-US" sz="1400" dirty="0"/>
+              <a:t>Graphics API</a:t>
+            </a:r>
+          </a:p>
+        </p:txBody>
+      </p:sp>
+      <p:sp>
+        <p:nvSpPr>
+          <p:cNvPr id="12" name="Prostokąt: zaokrąglone rogi 11">
+            <a:extLst>
+              <a:ext uri="{FF2B5EF4-FFF2-40B4-BE49-F238E27FC236}">
+                <a16:creationId xmlns:a16="http://schemas.microsoft.com/office/drawing/2014/main" id="{066F4DC9-9186-8982-59DA-AEE3A6F58DC3}"/>
+              </a:ext>
+            </a:extLst>
+          </p:cNvPr>
+          <p:cNvSpPr/>
+          <p:nvPr/>
+        </p:nvSpPr>
+        <p:spPr>
+          <a:xfrm>
+            <a:off x="5526839" y="3646715"/>
+            <a:ext cx="1138323" cy="454087"/>
+          </a:xfrm>
+          <a:prstGeom prst="roundRect">
+            <a:avLst/>
+          </a:prstGeom>
+        </p:spPr>
+        <p:style>
+          <a:lnRef idx="0">
+            <a:schemeClr val="accent2"/>
+          </a:lnRef>
+          <a:fillRef idx="3">
+            <a:schemeClr val="accent2"/>
+          </a:fillRef>
+          <a:effectRef idx="3">
+            <a:schemeClr val="accent2"/>
+          </a:effectRef>
+          <a:fontRef idx="minor">
+            <a:schemeClr val="lt1"/>
+          </a:fontRef>
+        </p:style>
+        <p:txBody>
+          <a:bodyPr rtlCol="0" anchor="ctr"/>
+          <a:lstStyle/>
+          <a:p>
+            <a:pPr algn="ctr"/>
+            <a:r>
+              <a:rPr lang="en-US" sz="1400" dirty="0"/>
+              <a:t>Window</a:t>
+            </a:r>
+          </a:p>
+        </p:txBody>
+      </p:sp>
+      <p:sp>
+        <p:nvSpPr>
+          <p:cNvPr id="13" name="Prostokąt: zaokrąglone rogi 12">
+            <a:extLst>
+              <a:ext uri="{FF2B5EF4-FFF2-40B4-BE49-F238E27FC236}">
+                <a16:creationId xmlns:a16="http://schemas.microsoft.com/office/drawing/2014/main" id="{C6BC2550-72CE-D6D5-8C25-5D71EA04EDFB}"/>
+              </a:ext>
+            </a:extLst>
+          </p:cNvPr>
+          <p:cNvSpPr/>
+          <p:nvPr/>
+        </p:nvSpPr>
+        <p:spPr>
+          <a:xfrm>
+            <a:off x="7163851" y="3646715"/>
+            <a:ext cx="1138323" cy="454087"/>
+          </a:xfrm>
+          <a:prstGeom prst="roundRect">
+            <a:avLst/>
+          </a:prstGeom>
+        </p:spPr>
+        <p:style>
+          <a:lnRef idx="0">
+            <a:schemeClr val="accent2"/>
+          </a:lnRef>
+          <a:fillRef idx="3">
+            <a:schemeClr val="accent2"/>
+          </a:fillRef>
+          <a:effectRef idx="3">
+            <a:schemeClr val="accent2"/>
+          </a:effectRef>
+          <a:fontRef idx="minor">
+            <a:schemeClr val="lt1"/>
+          </a:fontRef>
+        </p:style>
+        <p:txBody>
+          <a:bodyPr rtlCol="0" anchor="ctr"/>
+          <a:lstStyle/>
+          <a:p>
+            <a:pPr algn="ctr"/>
+            <a:r>
+              <a:rPr lang="en-US" sz="1400" dirty="0" err="1"/>
+              <a:t>Swapchain</a:t>
+            </a:r>
+            <a:endParaRPr lang="en-US" sz="1400" dirty="0"/>
+          </a:p>
+        </p:txBody>
+      </p:sp>
+      <p:sp>
+        <p:nvSpPr>
+          <p:cNvPr id="14" name="Prostokąt: zaokrąglone rogi 13">
+            <a:extLst>
+              <a:ext uri="{FF2B5EF4-FFF2-40B4-BE49-F238E27FC236}">
+                <a16:creationId xmlns:a16="http://schemas.microsoft.com/office/drawing/2014/main" id="{D3345082-99A5-A849-03C0-555D2484B34B}"/>
+              </a:ext>
+            </a:extLst>
+          </p:cNvPr>
+          <p:cNvSpPr/>
+          <p:nvPr/>
+        </p:nvSpPr>
+        <p:spPr>
+          <a:xfrm>
+            <a:off x="10437874" y="3646714"/>
+            <a:ext cx="1138323" cy="454087"/>
+          </a:xfrm>
+          <a:prstGeom prst="roundRect">
+            <a:avLst/>
+          </a:prstGeom>
+        </p:spPr>
+        <p:style>
+          <a:lnRef idx="0">
+            <a:schemeClr val="accent2"/>
+          </a:lnRef>
+          <a:fillRef idx="3">
+            <a:schemeClr val="accent2"/>
+          </a:fillRef>
+          <a:effectRef idx="3">
+            <a:schemeClr val="accent2"/>
+          </a:effectRef>
+          <a:fontRef idx="minor">
+            <a:schemeClr val="lt1"/>
+          </a:fontRef>
+        </p:style>
+        <p:txBody>
+          <a:bodyPr rtlCol="0" anchor="ctr"/>
+          <a:lstStyle/>
+          <a:p>
+            <a:pPr algn="ctr"/>
+            <a:r>
+              <a:rPr lang="en-US" sz="1400" dirty="0"/>
+              <a:t>Input polling</a:t>
+            </a:r>
+          </a:p>
+        </p:txBody>
+      </p:sp>
+      <p:sp>
+        <p:nvSpPr>
+          <p:cNvPr id="15" name="Prostokąt: zaokrąglone rogi 14">
+            <a:extLst>
+              <a:ext uri="{FF2B5EF4-FFF2-40B4-BE49-F238E27FC236}">
+                <a16:creationId xmlns:a16="http://schemas.microsoft.com/office/drawing/2014/main" id="{42F886CD-FDB1-60DC-EC96-335D94A0318A}"/>
+              </a:ext>
+            </a:extLst>
+          </p:cNvPr>
+          <p:cNvSpPr/>
+          <p:nvPr/>
+        </p:nvSpPr>
+        <p:spPr>
+          <a:xfrm>
+            <a:off x="478972" y="1620417"/>
+            <a:ext cx="11234056" cy="1010816"/>
+          </a:xfrm>
+          <a:prstGeom prst="roundRect">
+            <a:avLst/>
+          </a:prstGeom>
+        </p:spPr>
+        <p:style>
+          <a:lnRef idx="1">
+            <a:schemeClr val="accent3"/>
+          </a:lnRef>
+          <a:fillRef idx="2">
+            <a:schemeClr val="accent3"/>
+          </a:fillRef>
+          <a:effectRef idx="1">
+            <a:schemeClr val="accent3"/>
+          </a:effectRef>
+          <a:fontRef idx="minor">
+            <a:schemeClr val="dk1"/>
+          </a:fontRef>
+        </p:style>
+        <p:txBody>
+          <a:bodyPr rtlCol="0" anchor="t"/>
+          <a:lstStyle/>
+          <a:p>
+            <a:pPr algn="ctr"/>
+            <a:r>
+              <a:rPr lang="en-US" sz="1600" dirty="0"/>
+              <a:t>Application Layer</a:t>
+            </a:r>
+          </a:p>
+        </p:txBody>
+      </p:sp>
+      <p:sp>
+        <p:nvSpPr>
+          <p:cNvPr id="16" name="Prostokąt: zaokrąglone rogi 15">
+            <a:extLst>
+              <a:ext uri="{FF2B5EF4-FFF2-40B4-BE49-F238E27FC236}">
+                <a16:creationId xmlns:a16="http://schemas.microsoft.com/office/drawing/2014/main" id="{2EDF1FDD-8E7A-90AA-8E4B-11324640AEC3}"/>
+              </a:ext>
+            </a:extLst>
+          </p:cNvPr>
+          <p:cNvSpPr/>
+          <p:nvPr/>
+        </p:nvSpPr>
+        <p:spPr>
+          <a:xfrm>
+            <a:off x="615803" y="2055845"/>
+            <a:ext cx="1138323" cy="454087"/>
+          </a:xfrm>
+          <a:prstGeom prst="roundRect">
+            <a:avLst/>
+          </a:prstGeom>
+        </p:spPr>
+        <p:style>
+          <a:lnRef idx="0">
+            <a:schemeClr val="accent3"/>
+          </a:lnRef>
+          <a:fillRef idx="3">
+            <a:schemeClr val="accent3"/>
+          </a:fillRef>
+          <a:effectRef idx="3">
+            <a:schemeClr val="accent3"/>
+          </a:effectRef>
+          <a:fontRef idx="minor">
+            <a:schemeClr val="lt1"/>
+          </a:fontRef>
+        </p:style>
+        <p:txBody>
+          <a:bodyPr rtlCol="0" anchor="ctr"/>
+          <a:lstStyle/>
+          <a:p>
+            <a:pPr algn="ctr"/>
+            <a:r>
+              <a:rPr lang="en-US" sz="1400" dirty="0"/>
+              <a:t>Application</a:t>
+            </a:r>
+          </a:p>
+        </p:txBody>
+      </p:sp>
+      <p:sp>
+        <p:nvSpPr>
+          <p:cNvPr id="17" name="Prostokąt: zaokrąglone rogi 16">
+            <a:extLst>
+              <a:ext uri="{FF2B5EF4-FFF2-40B4-BE49-F238E27FC236}">
+                <a16:creationId xmlns:a16="http://schemas.microsoft.com/office/drawing/2014/main" id="{4B87D7A6-49E7-5E20-241F-8758561D2C96}"/>
+              </a:ext>
+            </a:extLst>
+          </p:cNvPr>
+          <p:cNvSpPr/>
+          <p:nvPr/>
+        </p:nvSpPr>
+        <p:spPr>
+          <a:xfrm>
+            <a:off x="3422109" y="2055844"/>
+            <a:ext cx="1138323" cy="454087"/>
+          </a:xfrm>
+          <a:prstGeom prst="roundRect">
+            <a:avLst/>
+          </a:prstGeom>
+        </p:spPr>
+        <p:style>
+          <a:lnRef idx="0">
+            <a:schemeClr val="accent3"/>
+          </a:lnRef>
+          <a:fillRef idx="3">
+            <a:schemeClr val="accent3"/>
+          </a:fillRef>
+          <a:effectRef idx="3">
+            <a:schemeClr val="accent3"/>
+          </a:effectRef>
+          <a:fontRef idx="minor">
+            <a:schemeClr val="lt1"/>
+          </a:fontRef>
+        </p:style>
+        <p:txBody>
+          <a:bodyPr rtlCol="0" anchor="ctr"/>
+          <a:lstStyle/>
+          <a:p>
+            <a:pPr algn="ctr"/>
+            <a:r>
+              <a:rPr lang="en-US" sz="1400" dirty="0"/>
+              <a:t>Startup, Shutdown</a:t>
+            </a:r>
+          </a:p>
+        </p:txBody>
+      </p:sp>
+      <p:sp>
+        <p:nvSpPr>
+          <p:cNvPr id="18" name="Prostokąt: zaokrąglone rogi 17">
+            <a:extLst>
+              <a:ext uri="{FF2B5EF4-FFF2-40B4-BE49-F238E27FC236}">
+                <a16:creationId xmlns:a16="http://schemas.microsoft.com/office/drawing/2014/main" id="{2D45F15D-0AC4-0927-97A9-EF1976F528A2}"/>
+              </a:ext>
+            </a:extLst>
+          </p:cNvPr>
+          <p:cNvSpPr/>
+          <p:nvPr/>
+        </p:nvSpPr>
+        <p:spPr>
+          <a:xfrm>
+            <a:off x="4825262" y="2038743"/>
+            <a:ext cx="1138323" cy="454087"/>
+          </a:xfrm>
+          <a:prstGeom prst="roundRect">
+            <a:avLst/>
+          </a:prstGeom>
+        </p:spPr>
+        <p:style>
+          <a:lnRef idx="0">
+            <a:schemeClr val="accent3"/>
+          </a:lnRef>
+          <a:fillRef idx="3">
+            <a:schemeClr val="accent3"/>
+          </a:fillRef>
+          <a:effectRef idx="3">
+            <a:schemeClr val="accent3"/>
+          </a:effectRef>
+          <a:fontRef idx="minor">
+            <a:schemeClr val="lt1"/>
+          </a:fontRef>
+        </p:style>
+        <p:txBody>
+          <a:bodyPr rtlCol="0" anchor="ctr"/>
+          <a:lstStyle/>
+          <a:p>
+            <a:pPr algn="ctr"/>
+            <a:r>
+              <a:rPr lang="en-US" sz="1400" dirty="0"/>
+              <a:t>IoC Layers Stack</a:t>
+            </a:r>
+          </a:p>
+        </p:txBody>
+      </p:sp>
+      <p:sp>
+        <p:nvSpPr>
+          <p:cNvPr id="19" name="Prostokąt: zaokrąglone rogi 18">
+            <a:extLst>
+              <a:ext uri="{FF2B5EF4-FFF2-40B4-BE49-F238E27FC236}">
+                <a16:creationId xmlns:a16="http://schemas.microsoft.com/office/drawing/2014/main" id="{9974360C-F022-DD99-7A62-8D1E752A668F}"/>
+              </a:ext>
+            </a:extLst>
+          </p:cNvPr>
+          <p:cNvSpPr/>
+          <p:nvPr/>
+        </p:nvSpPr>
+        <p:spPr>
+          <a:xfrm>
+            <a:off x="6228415" y="2055844"/>
+            <a:ext cx="1138323" cy="454087"/>
+          </a:xfrm>
+          <a:prstGeom prst="roundRect">
+            <a:avLst/>
+          </a:prstGeom>
+        </p:spPr>
+        <p:style>
+          <a:lnRef idx="0">
+            <a:schemeClr val="accent3"/>
+          </a:lnRef>
+          <a:fillRef idx="3">
+            <a:schemeClr val="accent3"/>
+          </a:fillRef>
+          <a:effectRef idx="3">
+            <a:schemeClr val="accent3"/>
+          </a:effectRef>
+          <a:fontRef idx="minor">
+            <a:schemeClr val="lt1"/>
+          </a:fontRef>
+        </p:style>
+        <p:txBody>
+          <a:bodyPr rtlCol="0" anchor="ctr"/>
+          <a:lstStyle/>
+          <a:p>
+            <a:pPr algn="ctr"/>
+            <a:r>
+              <a:rPr lang="en-US" sz="1400" dirty="0"/>
+              <a:t>Project</a:t>
+            </a:r>
+          </a:p>
+        </p:txBody>
+      </p:sp>
+      <p:sp>
+        <p:nvSpPr>
+          <p:cNvPr id="20" name="Prostokąt: zaokrąglone rogi 19">
+            <a:extLst>
+              <a:ext uri="{FF2B5EF4-FFF2-40B4-BE49-F238E27FC236}">
+                <a16:creationId xmlns:a16="http://schemas.microsoft.com/office/drawing/2014/main" id="{EC0CC2D6-884E-787C-E728-C56CA15B36BD}"/>
+              </a:ext>
+            </a:extLst>
+          </p:cNvPr>
+          <p:cNvSpPr/>
+          <p:nvPr/>
+        </p:nvSpPr>
+        <p:spPr>
+          <a:xfrm>
+            <a:off x="7631568" y="2055844"/>
+            <a:ext cx="1138323" cy="454087"/>
+          </a:xfrm>
+          <a:prstGeom prst="roundRect">
+            <a:avLst/>
+          </a:prstGeom>
+        </p:spPr>
+        <p:style>
+          <a:lnRef idx="0">
+            <a:schemeClr val="accent3"/>
+          </a:lnRef>
+          <a:fillRef idx="3">
+            <a:schemeClr val="accent3"/>
+          </a:fillRef>
+          <a:effectRef idx="3">
+            <a:schemeClr val="accent3"/>
+          </a:effectRef>
+          <a:fontRef idx="minor">
+            <a:schemeClr val="lt1"/>
+          </a:fontRef>
+        </p:style>
+        <p:txBody>
+          <a:bodyPr rtlCol="0" anchor="ctr"/>
+          <a:lstStyle/>
+          <a:p>
+            <a:pPr algn="ctr"/>
+            <a:r>
+              <a:rPr lang="en-US" sz="1400" dirty="0"/>
+              <a:t>Type Registries</a:t>
+            </a:r>
+          </a:p>
+        </p:txBody>
+      </p:sp>
+      <p:sp>
+        <p:nvSpPr>
+          <p:cNvPr id="21" name="Prostokąt: zaokrąglone rogi 20">
+            <a:extLst>
+              <a:ext uri="{FF2B5EF4-FFF2-40B4-BE49-F238E27FC236}">
+                <a16:creationId xmlns:a16="http://schemas.microsoft.com/office/drawing/2014/main" id="{2016A259-602C-1720-F899-4331BEF1AB50}"/>
+              </a:ext>
+            </a:extLst>
+          </p:cNvPr>
+          <p:cNvSpPr/>
+          <p:nvPr/>
+        </p:nvSpPr>
+        <p:spPr>
+          <a:xfrm>
+            <a:off x="9034721" y="2055844"/>
+            <a:ext cx="1138323" cy="454087"/>
+          </a:xfrm>
+          <a:prstGeom prst="roundRect">
+            <a:avLst/>
+          </a:prstGeom>
+        </p:spPr>
+        <p:style>
+          <a:lnRef idx="0">
+            <a:schemeClr val="accent3"/>
+          </a:lnRef>
+          <a:fillRef idx="3">
+            <a:schemeClr val="accent3"/>
+          </a:fillRef>
+          <a:effectRef idx="3">
+            <a:schemeClr val="accent3"/>
+          </a:effectRef>
+          <a:fontRef idx="minor">
+            <a:schemeClr val="lt1"/>
+          </a:fontRef>
+        </p:style>
+        <p:txBody>
+          <a:bodyPr rtlCol="0" anchor="ctr"/>
+          <a:lstStyle/>
+          <a:p>
+            <a:pPr algn="ctr"/>
+            <a:r>
+              <a:rPr lang="en-US" sz="1400" dirty="0"/>
+              <a:t>UUID</a:t>
+            </a:r>
+          </a:p>
+        </p:txBody>
+      </p:sp>
+      <p:sp>
+        <p:nvSpPr>
+          <p:cNvPr id="29" name="Prostokąt: zaokrąglone rogi 28">
+            <a:extLst>
+              <a:ext uri="{FF2B5EF4-FFF2-40B4-BE49-F238E27FC236}">
+                <a16:creationId xmlns:a16="http://schemas.microsoft.com/office/drawing/2014/main" id="{449ABC7D-7EC9-8311-8923-CFAC7447FF1F}"/>
+              </a:ext>
+            </a:extLst>
+          </p:cNvPr>
+          <p:cNvSpPr/>
+          <p:nvPr/>
+        </p:nvSpPr>
+        <p:spPr>
+          <a:xfrm>
+            <a:off x="8800863" y="3646714"/>
+            <a:ext cx="1138323" cy="454087"/>
+          </a:xfrm>
+          <a:prstGeom prst="roundRect">
+            <a:avLst/>
+          </a:prstGeom>
+        </p:spPr>
+        <p:style>
+          <a:lnRef idx="0">
+            <a:schemeClr val="accent2"/>
+          </a:lnRef>
+          <a:fillRef idx="3">
+            <a:schemeClr val="accent2"/>
+          </a:fillRef>
+          <a:effectRef idx="3">
+            <a:schemeClr val="accent2"/>
+          </a:effectRef>
+          <a:fontRef idx="minor">
+            <a:schemeClr val="lt1"/>
+          </a:fontRef>
+        </p:style>
+        <p:txBody>
+          <a:bodyPr rtlCol="0" anchor="ctr"/>
+          <a:lstStyle/>
+          <a:p>
+            <a:pPr algn="ctr"/>
+            <a:r>
+              <a:rPr lang="en-US" sz="1400" dirty="0"/>
+              <a:t>OS events</a:t>
+            </a:r>
+          </a:p>
+        </p:txBody>
+      </p:sp>
+      <p:sp>
+        <p:nvSpPr>
+          <p:cNvPr id="32" name="Prostokąt: zaokrąglone rogi 31">
+            <a:extLst>
+              <a:ext uri="{FF2B5EF4-FFF2-40B4-BE49-F238E27FC236}">
+                <a16:creationId xmlns:a16="http://schemas.microsoft.com/office/drawing/2014/main" id="{39C24A91-D400-6CD7-A53D-453842EF7729}"/>
+              </a:ext>
+            </a:extLst>
+          </p:cNvPr>
+          <p:cNvSpPr/>
+          <p:nvPr/>
+        </p:nvSpPr>
+        <p:spPr>
+          <a:xfrm>
+            <a:off x="10437874" y="2038743"/>
+            <a:ext cx="1138323" cy="454087"/>
+          </a:xfrm>
+          <a:prstGeom prst="roundRect">
+            <a:avLst/>
+          </a:prstGeom>
+        </p:spPr>
+        <p:style>
+          <a:lnRef idx="0">
+            <a:schemeClr val="accent3"/>
+          </a:lnRef>
+          <a:fillRef idx="3">
+            <a:schemeClr val="accent3"/>
+          </a:fillRef>
+          <a:effectRef idx="3">
+            <a:schemeClr val="accent3"/>
+          </a:effectRef>
+          <a:fontRef idx="minor">
+            <a:schemeClr val="lt1"/>
+          </a:fontRef>
+        </p:style>
+        <p:txBody>
+          <a:bodyPr rtlCol="0" anchor="ctr"/>
+          <a:lstStyle/>
+          <a:p>
+            <a:pPr algn="ctr"/>
+            <a:r>
+              <a:rPr lang="en-US" sz="1400" dirty="0"/>
+              <a:t>Update Module</a:t>
+            </a:r>
+          </a:p>
+        </p:txBody>
+      </p:sp>
+      <p:sp>
+        <p:nvSpPr>
+          <p:cNvPr id="33" name="Prostokąt: zaokrąglone rogi 32">
+            <a:extLst>
+              <a:ext uri="{FF2B5EF4-FFF2-40B4-BE49-F238E27FC236}">
+                <a16:creationId xmlns:a16="http://schemas.microsoft.com/office/drawing/2014/main" id="{66D8BB27-4BF9-4A39-A5A7-46710B24F0CC}"/>
+              </a:ext>
+            </a:extLst>
+          </p:cNvPr>
+          <p:cNvSpPr/>
+          <p:nvPr/>
+        </p:nvSpPr>
+        <p:spPr>
+          <a:xfrm>
+            <a:off x="2018956" y="2055844"/>
+            <a:ext cx="1138323" cy="454087"/>
+          </a:xfrm>
+          <a:prstGeom prst="roundRect">
+            <a:avLst/>
+          </a:prstGeom>
+        </p:spPr>
+        <p:style>
+          <a:lnRef idx="0">
+            <a:schemeClr val="accent3"/>
+          </a:lnRef>
+          <a:fillRef idx="3">
+            <a:schemeClr val="accent3"/>
+          </a:fillRef>
+          <a:effectRef idx="3">
+            <a:schemeClr val="accent3"/>
+          </a:effectRef>
+          <a:fontRef idx="minor">
+            <a:schemeClr val="lt1"/>
+          </a:fontRef>
+        </p:style>
+        <p:txBody>
+          <a:bodyPr rtlCol="0" anchor="ctr"/>
+          <a:lstStyle/>
+          <a:p>
+            <a:pPr algn="ctr"/>
+            <a:r>
+              <a:rPr lang="en-US" sz="1400" dirty="0" err="1"/>
+              <a:t>ImGui</a:t>
+            </a:r>
+            <a:endParaRPr lang="en-US" sz="1400" dirty="0"/>
+          </a:p>
+        </p:txBody>
+      </p:sp>
+      <p:sp>
+        <p:nvSpPr>
+          <p:cNvPr id="34" name="Prostokąt: zaokrąglone rogi 33">
+            <a:extLst>
+              <a:ext uri="{FF2B5EF4-FFF2-40B4-BE49-F238E27FC236}">
+                <a16:creationId xmlns:a16="http://schemas.microsoft.com/office/drawing/2014/main" id="{9E6A4074-679D-A492-B233-1E3299DE4A0D}"/>
+              </a:ext>
+            </a:extLst>
+          </p:cNvPr>
+          <p:cNvSpPr/>
+          <p:nvPr/>
+        </p:nvSpPr>
+        <p:spPr>
+          <a:xfrm>
+            <a:off x="2921714" y="5231361"/>
+            <a:ext cx="1138323" cy="454087"/>
+          </a:xfrm>
+          <a:prstGeom prst="roundRect">
+            <a:avLst/>
+          </a:prstGeom>
+        </p:spPr>
+        <p:style>
+          <a:lnRef idx="0">
+            <a:schemeClr val="accent1"/>
+          </a:lnRef>
+          <a:fillRef idx="3">
+            <a:schemeClr val="accent1"/>
+          </a:fillRef>
+          <a:effectRef idx="3">
+            <a:schemeClr val="accent1"/>
+          </a:effectRef>
+          <a:fontRef idx="minor">
+            <a:schemeClr val="lt1"/>
+          </a:fontRef>
+        </p:style>
+        <p:txBody>
+          <a:bodyPr rtlCol="0" anchor="ctr"/>
+          <a:lstStyle/>
+          <a:p>
+            <a:pPr algn="ctr"/>
+            <a:r>
+              <a:rPr lang="en-US" sz="1400" dirty="0"/>
+              <a:t>Enum struct</a:t>
+            </a:r>
+          </a:p>
+        </p:txBody>
+      </p:sp>
+      <p:sp>
+        <p:nvSpPr>
+          <p:cNvPr id="35" name="Prostokąt: zaokrąglone rogi 34">
+            <a:extLst>
+              <a:ext uri="{FF2B5EF4-FFF2-40B4-BE49-F238E27FC236}">
+                <a16:creationId xmlns:a16="http://schemas.microsoft.com/office/drawing/2014/main" id="{19FBD40F-2ED5-500D-9033-EA588BE52B43}"/>
+              </a:ext>
+            </a:extLst>
+          </p:cNvPr>
+          <p:cNvSpPr/>
+          <p:nvPr/>
+        </p:nvSpPr>
+        <p:spPr>
+          <a:xfrm>
+            <a:off x="4658464" y="5231360"/>
+            <a:ext cx="1138323" cy="454087"/>
+          </a:xfrm>
+          <a:prstGeom prst="roundRect">
+            <a:avLst/>
+          </a:prstGeom>
+        </p:spPr>
+        <p:style>
+          <a:lnRef idx="0">
+            <a:schemeClr val="accent1"/>
+          </a:lnRef>
+          <a:fillRef idx="3">
+            <a:schemeClr val="accent1"/>
+          </a:fillRef>
+          <a:effectRef idx="3">
+            <a:schemeClr val="accent1"/>
+          </a:effectRef>
+          <a:fontRef idx="minor">
+            <a:schemeClr val="lt1"/>
+          </a:fontRef>
+        </p:style>
+        <p:txBody>
+          <a:bodyPr rtlCol="0" anchor="ctr"/>
+          <a:lstStyle/>
+          <a:p>
+            <a:pPr algn="ctr"/>
+            <a:r>
+              <a:rPr lang="en-US" sz="1400" dirty="0"/>
+              <a:t>Math library</a:t>
+            </a:r>
           </a:p>
         </p:txBody>
       </p:sp>
@@ -4675,7 +5889,15 @@
               <a:rPr lang="pl-PL" sz="2000" dirty="0" err="1"/>
               <a:t>Lifetimes</a:t>
             </a:r>
-            <a:endParaRPr lang="en-US" sz="1400" dirty="0"/>
+            <a:r>
+              <a:rPr lang="en-US" sz="2000" dirty="0"/>
+              <a:t> </a:t>
+            </a:r>
+            <a:r>
+              <a:rPr lang="en-US" sz="1050" dirty="0"/>
+              <a:t>(temporary)</a:t>
+            </a:r>
+            <a:endParaRPr lang="en-US" sz="2000" dirty="0"/>
           </a:p>
         </p:txBody>
       </p:sp>

--- a/Documentation/Core Architecture.pptx
+++ b/Documentation/Core Architecture.pptx
@@ -3384,6 +3384,140 @@
         </a:p>
       </dgm:t>
     </dgm:pt>
+    <dgm:pt modelId="{1BB58C00-0717-4757-B97A-822FCB7CF1E4}">
+      <dgm:prSet phldrT="[Tekst]"/>
+      <dgm:spPr/>
+      <dgm:t>
+        <a:bodyPr/>
+        <a:lstStyle/>
+        <a:p>
+          <a:r>
+            <a:rPr lang="en-US" dirty="0"/>
+            <a:t>Splice &amp; Array</a:t>
+          </a:r>
+        </a:p>
+      </dgm:t>
+    </dgm:pt>
+    <dgm:pt modelId="{A7529454-20CE-4323-B50D-70587E64BF8D}" type="parTrans" cxnId="{96BE818B-6C55-4AD1-BA5F-6EDB48B13CB3}">
+      <dgm:prSet/>
+      <dgm:spPr/>
+      <dgm:t>
+        <a:bodyPr/>
+        <a:lstStyle/>
+        <a:p>
+          <a:endParaRPr lang="en-US"/>
+        </a:p>
+      </dgm:t>
+    </dgm:pt>
+    <dgm:pt modelId="{571A5B9B-A753-4F39-9718-20F8F03F813A}" type="sibTrans" cxnId="{96BE818B-6C55-4AD1-BA5F-6EDB48B13CB3}">
+      <dgm:prSet/>
+      <dgm:spPr/>
+      <dgm:t>
+        <a:bodyPr/>
+        <a:lstStyle/>
+        <a:p>
+          <a:endParaRPr lang="en-US"/>
+        </a:p>
+      </dgm:t>
+    </dgm:pt>
+    <dgm:pt modelId="{201C1BB5-B33D-4420-BB6E-88E5220FA8B7}">
+      <dgm:prSet phldrT="[Tekst]"/>
+      <dgm:spPr/>
+      <dgm:t>
+        <a:bodyPr/>
+        <a:lstStyle/>
+        <a:p>
+          <a:r>
+            <a:rPr lang="en-US" dirty="0" err="1"/>
+            <a:t>SpliceArena</a:t>
+          </a:r>
+          <a:r>
+            <a:rPr lang="en-US" dirty="0"/>
+            <a:t> &amp; </a:t>
+          </a:r>
+          <a:r>
+            <a:rPr lang="en-US" dirty="0" err="1"/>
+            <a:t>ArrayArena</a:t>
+          </a:r>
+          <a:endParaRPr lang="en-US" dirty="0"/>
+        </a:p>
+      </dgm:t>
+    </dgm:pt>
+    <dgm:pt modelId="{936C081A-ED40-4588-AD12-0A621D1FEAB6}" type="parTrans" cxnId="{95673242-483B-45D0-81FF-CF49089D32A9}">
+      <dgm:prSet/>
+      <dgm:spPr/>
+      <dgm:t>
+        <a:bodyPr/>
+        <a:lstStyle/>
+        <a:p>
+          <a:endParaRPr lang="en-US"/>
+        </a:p>
+      </dgm:t>
+    </dgm:pt>
+    <dgm:pt modelId="{F38C5216-89B5-42FF-9F69-89634D8F61C9}" type="sibTrans" cxnId="{95673242-483B-45D0-81FF-CF49089D32A9}">
+      <dgm:prSet/>
+      <dgm:spPr/>
+      <dgm:t>
+        <a:bodyPr/>
+        <a:lstStyle/>
+        <a:p>
+          <a:endParaRPr lang="en-US"/>
+        </a:p>
+      </dgm:t>
+    </dgm:pt>
+    <dgm:pt modelId="{979B3400-130B-493D-BC38-04D698DFEA6B}">
+      <dgm:prSet phldrT="[Tekst]"/>
+      <dgm:spPr/>
+      <dgm:t>
+        <a:bodyPr/>
+        <a:lstStyle/>
+        <a:p>
+          <a:r>
+            <a:rPr lang="en-US" dirty="0" err="1"/>
+            <a:t>DynArr</a:t>
+          </a:r>
+          <a:r>
+            <a:rPr lang="en-US" dirty="0"/>
+            <a:t>, </a:t>
+          </a:r>
+          <a:r>
+            <a:rPr lang="en-US" dirty="0" err="1"/>
+            <a:t>DynArrAllocPM</a:t>
+          </a:r>
+          <a:r>
+            <a:rPr lang="en-US" dirty="0"/>
+            <a:t> &amp; </a:t>
+          </a:r>
+          <a:r>
+            <a:rPr lang="en-US" dirty="0" err="1"/>
+            <a:t>DynArrAlloc</a:t>
+          </a:r>
+          <a:endParaRPr lang="en-US" dirty="0"/>
+        </a:p>
+      </dgm:t>
+    </dgm:pt>
+    <dgm:pt modelId="{2086B25A-4E07-441F-99DA-E83F41927D72}" type="parTrans" cxnId="{932C32FD-9FBA-4DAC-A8E8-F0CF6970E999}">
+      <dgm:prSet/>
+      <dgm:spPr/>
+      <dgm:t>
+        <a:bodyPr/>
+        <a:lstStyle/>
+        <a:p>
+          <a:endParaRPr lang="en-US"/>
+        </a:p>
+      </dgm:t>
+    </dgm:pt>
+    <dgm:pt modelId="{5FCCD772-2FC0-42E6-97C6-78FFBF2FACDE}" type="sibTrans" cxnId="{932C32FD-9FBA-4DAC-A8E8-F0CF6970E999}">
+      <dgm:prSet/>
+      <dgm:spPr/>
+      <dgm:t>
+        <a:bodyPr/>
+        <a:lstStyle/>
+        <a:p>
+          <a:endParaRPr lang="en-US"/>
+        </a:p>
+      </dgm:t>
+    </dgm:pt>
     <dgm:pt modelId="{6A67CA82-7CB7-4DB5-BC7F-A3723519ED87}" type="pres">
       <dgm:prSet presAssocID="{9715B7D8-928C-426A-B475-4DF38CFE8C5B}" presName="diagram" presStyleCnt="0">
         <dgm:presLayoutVars>
@@ -3394,7 +3528,7 @@
       <dgm:spPr/>
     </dgm:pt>
     <dgm:pt modelId="{6B52F8D2-8F53-4630-AA25-FB723B70E835}" type="pres">
-      <dgm:prSet presAssocID="{5734A286-2148-41EB-A0E1-8F3896B4EFB7}" presName="node" presStyleLbl="node1" presStyleIdx="0" presStyleCnt="7">
+      <dgm:prSet presAssocID="{5734A286-2148-41EB-A0E1-8F3896B4EFB7}" presName="node" presStyleLbl="node1" presStyleIdx="0" presStyleCnt="10">
         <dgm:presLayoutVars>
           <dgm:bulletEnabled val="1"/>
         </dgm:presLayoutVars>
@@ -3406,7 +3540,7 @@
       <dgm:spPr/>
     </dgm:pt>
     <dgm:pt modelId="{E45BD07B-E675-401A-BC69-D39BB7778087}" type="pres">
-      <dgm:prSet presAssocID="{3E033CD6-1D60-4A57-87DC-C4D5C83BA54C}" presName="node" presStyleLbl="node1" presStyleIdx="1" presStyleCnt="7">
+      <dgm:prSet presAssocID="{3E033CD6-1D60-4A57-87DC-C4D5C83BA54C}" presName="node" presStyleLbl="node1" presStyleIdx="1" presStyleCnt="10">
         <dgm:presLayoutVars>
           <dgm:bulletEnabled val="1"/>
         </dgm:presLayoutVars>
@@ -3418,7 +3552,7 @@
       <dgm:spPr/>
     </dgm:pt>
     <dgm:pt modelId="{2B393AAD-0675-48D8-BAB3-9C08A9F6BD4D}" type="pres">
-      <dgm:prSet presAssocID="{5DFC3C75-4307-46E1-BFD0-31E90368402C}" presName="node" presStyleLbl="node1" presStyleIdx="2" presStyleCnt="7">
+      <dgm:prSet presAssocID="{5DFC3C75-4307-46E1-BFD0-31E90368402C}" presName="node" presStyleLbl="node1" presStyleIdx="2" presStyleCnt="10">
         <dgm:presLayoutVars>
           <dgm:bulletEnabled val="1"/>
         </dgm:presLayoutVars>
@@ -3430,7 +3564,7 @@
       <dgm:spPr/>
     </dgm:pt>
     <dgm:pt modelId="{8889BB9F-CF2F-4254-87DD-5D1E5EB686AA}" type="pres">
-      <dgm:prSet presAssocID="{143DBCD2-604E-49AD-AF47-EA4451C2766E}" presName="node" presStyleLbl="node1" presStyleIdx="3" presStyleCnt="7">
+      <dgm:prSet presAssocID="{143DBCD2-604E-49AD-AF47-EA4451C2766E}" presName="node" presStyleLbl="node1" presStyleIdx="3" presStyleCnt="10">
         <dgm:presLayoutVars>
           <dgm:bulletEnabled val="1"/>
         </dgm:presLayoutVars>
@@ -3442,7 +3576,7 @@
       <dgm:spPr/>
     </dgm:pt>
     <dgm:pt modelId="{A97B010E-89D0-431F-BDBA-7E3168873D2A}" type="pres">
-      <dgm:prSet presAssocID="{F076E82E-AB8B-4F8A-B496-E41F64E4AA9D}" presName="node" presStyleLbl="node1" presStyleIdx="4" presStyleCnt="7">
+      <dgm:prSet presAssocID="{F076E82E-AB8B-4F8A-B496-E41F64E4AA9D}" presName="node" presStyleLbl="node1" presStyleIdx="4" presStyleCnt="10">
         <dgm:presLayoutVars>
           <dgm:bulletEnabled val="1"/>
         </dgm:presLayoutVars>
@@ -3454,7 +3588,7 @@
       <dgm:spPr/>
     </dgm:pt>
     <dgm:pt modelId="{7641B0FE-5465-49ED-BA37-8824287DA745}" type="pres">
-      <dgm:prSet presAssocID="{1B3247D7-F395-4526-94DE-4658E5C35501}" presName="node" presStyleLbl="node1" presStyleIdx="5" presStyleCnt="7">
+      <dgm:prSet presAssocID="{1B3247D7-F395-4526-94DE-4658E5C35501}" presName="node" presStyleLbl="node1" presStyleIdx="5" presStyleCnt="10">
         <dgm:presLayoutVars>
           <dgm:bulletEnabled val="1"/>
         </dgm:presLayoutVars>
@@ -3466,7 +3600,43 @@
       <dgm:spPr/>
     </dgm:pt>
     <dgm:pt modelId="{8DCF91ED-0B2B-4E36-B905-53C3765FC7A0}" type="pres">
-      <dgm:prSet presAssocID="{3C097E88-D424-4A2A-9DF9-1EB9D3DB1A00}" presName="node" presStyleLbl="node1" presStyleIdx="6" presStyleCnt="7">
+      <dgm:prSet presAssocID="{3C097E88-D424-4A2A-9DF9-1EB9D3DB1A00}" presName="node" presStyleLbl="node1" presStyleIdx="6" presStyleCnt="10">
+        <dgm:presLayoutVars>
+          <dgm:bulletEnabled val="1"/>
+        </dgm:presLayoutVars>
+      </dgm:prSet>
+      <dgm:spPr/>
+    </dgm:pt>
+    <dgm:pt modelId="{23A42582-C346-44A7-B848-2C26616EE192}" type="pres">
+      <dgm:prSet presAssocID="{ACB7B37F-C199-4B21-866A-43663209FB5E}" presName="sibTrans" presStyleCnt="0"/>
+      <dgm:spPr/>
+    </dgm:pt>
+    <dgm:pt modelId="{9902F2A7-BDBF-4AC6-B5DF-4186CACAB1DB}" type="pres">
+      <dgm:prSet presAssocID="{1BB58C00-0717-4757-B97A-822FCB7CF1E4}" presName="node" presStyleLbl="node1" presStyleIdx="7" presStyleCnt="10">
+        <dgm:presLayoutVars>
+          <dgm:bulletEnabled val="1"/>
+        </dgm:presLayoutVars>
+      </dgm:prSet>
+      <dgm:spPr/>
+    </dgm:pt>
+    <dgm:pt modelId="{A768CF93-1356-48FD-BD2D-A1A2FB41B877}" type="pres">
+      <dgm:prSet presAssocID="{571A5B9B-A753-4F39-9718-20F8F03F813A}" presName="sibTrans" presStyleCnt="0"/>
+      <dgm:spPr/>
+    </dgm:pt>
+    <dgm:pt modelId="{9A876780-72B7-4005-8E9C-A62DF4AAE3EB}" type="pres">
+      <dgm:prSet presAssocID="{201C1BB5-B33D-4420-BB6E-88E5220FA8B7}" presName="node" presStyleLbl="node1" presStyleIdx="8" presStyleCnt="10">
+        <dgm:presLayoutVars>
+          <dgm:bulletEnabled val="1"/>
+        </dgm:presLayoutVars>
+      </dgm:prSet>
+      <dgm:spPr/>
+    </dgm:pt>
+    <dgm:pt modelId="{1B2DF3C1-4E17-4D9A-8262-6C40C08BF4DF}" type="pres">
+      <dgm:prSet presAssocID="{F38C5216-89B5-42FF-9F69-89634D8F61C9}" presName="sibTrans" presStyleCnt="0"/>
+      <dgm:spPr/>
+    </dgm:pt>
+    <dgm:pt modelId="{50E97F52-9028-4251-9FB9-64AB05CA14EB}" type="pres">
+      <dgm:prSet presAssocID="{979B3400-130B-493D-BC38-04D698DFEA6B}" presName="node" presStyleLbl="node1" presStyleIdx="9" presStyleCnt="10">
         <dgm:presLayoutVars>
           <dgm:bulletEnabled val="1"/>
         </dgm:presLayoutVars>
@@ -3475,34 +3645,46 @@
     </dgm:pt>
   </dgm:ptLst>
   <dgm:cxnLst>
-    <dgm:cxn modelId="{5B9C7C05-AA01-408A-9F2A-BE4CC4434DBC}" type="presOf" srcId="{3C097E88-D424-4A2A-9DF9-1EB9D3DB1A00}" destId="{8DCF91ED-0B2B-4E36-B905-53C3765FC7A0}" srcOrd="0" destOrd="0" presId="urn:microsoft.com/office/officeart/2005/8/layout/default"/>
     <dgm:cxn modelId="{B08FD507-95E0-4801-8D60-73012D531957}" srcId="{9715B7D8-928C-426A-B475-4DF38CFE8C5B}" destId="{5DFC3C75-4307-46E1-BFD0-31E90368402C}" srcOrd="2" destOrd="0" parTransId="{0606626A-AC1F-4107-A4A1-45C0BFC17632}" sibTransId="{0C88665F-551C-4EA2-89A4-08B6DEE58261}"/>
     <dgm:cxn modelId="{2BDE5F0D-1696-4DB8-BA1F-F19FB9266B34}" type="presOf" srcId="{9715B7D8-928C-426A-B475-4DF38CFE8C5B}" destId="{6A67CA82-7CB7-4DB5-BC7F-A3723519ED87}" srcOrd="0" destOrd="0" presId="urn:microsoft.com/office/officeart/2005/8/layout/default"/>
+    <dgm:cxn modelId="{B345021B-1A57-402B-8004-8FD74C2EFDC7}" type="presOf" srcId="{5734A286-2148-41EB-A0E1-8F3896B4EFB7}" destId="{6B52F8D2-8F53-4630-AA25-FB723B70E835}" srcOrd="0" destOrd="0" presId="urn:microsoft.com/office/officeart/2005/8/layout/default"/>
     <dgm:cxn modelId="{04564A1C-1E54-41CF-BAF1-352EC2FB44BD}" srcId="{9715B7D8-928C-426A-B475-4DF38CFE8C5B}" destId="{3E033CD6-1D60-4A57-87DC-C4D5C83BA54C}" srcOrd="1" destOrd="0" parTransId="{DB7F1F37-D4EB-4FE6-B7FF-312D9E0D9B5C}" sibTransId="{26088B7A-FE53-4397-87C3-2DF47BE5238A}"/>
-    <dgm:cxn modelId="{2E386E3C-514B-4CF4-ABF2-923FE8AFEC84}" type="presOf" srcId="{3E033CD6-1D60-4A57-87DC-C4D5C83BA54C}" destId="{E45BD07B-E675-401A-BC69-D39BB7778087}" srcOrd="0" destOrd="0" presId="urn:microsoft.com/office/officeart/2005/8/layout/default"/>
-    <dgm:cxn modelId="{422CAF7C-4974-4FBB-BFF0-D113A60B081D}" type="presOf" srcId="{5734A286-2148-41EB-A0E1-8F3896B4EFB7}" destId="{6B52F8D2-8F53-4630-AA25-FB723B70E835}" srcOrd="0" destOrd="0" presId="urn:microsoft.com/office/officeart/2005/8/layout/default"/>
+    <dgm:cxn modelId="{95673242-483B-45D0-81FF-CF49089D32A9}" srcId="{9715B7D8-928C-426A-B475-4DF38CFE8C5B}" destId="{201C1BB5-B33D-4420-BB6E-88E5220FA8B7}" srcOrd="8" destOrd="0" parTransId="{936C081A-ED40-4588-AD12-0A621D1FEAB6}" sibTransId="{F38C5216-89B5-42FF-9F69-89634D8F61C9}"/>
+    <dgm:cxn modelId="{0EC9704C-5AC2-43E5-9649-CF51EA8195BC}" type="presOf" srcId="{F076E82E-AB8B-4F8A-B496-E41F64E4AA9D}" destId="{A97B010E-89D0-431F-BDBA-7E3168873D2A}" srcOrd="0" destOrd="0" presId="urn:microsoft.com/office/officeart/2005/8/layout/default"/>
+    <dgm:cxn modelId="{9C704F6F-CAF7-4A90-8422-B303F053773C}" type="presOf" srcId="{5DFC3C75-4307-46E1-BFD0-31E90368402C}" destId="{2B393AAD-0675-48D8-BAB3-9C08A9F6BD4D}" srcOrd="0" destOrd="0" presId="urn:microsoft.com/office/officeart/2005/8/layout/default"/>
+    <dgm:cxn modelId="{96BE818B-6C55-4AD1-BA5F-6EDB48B13CB3}" srcId="{9715B7D8-928C-426A-B475-4DF38CFE8C5B}" destId="{1BB58C00-0717-4757-B97A-822FCB7CF1E4}" srcOrd="7" destOrd="0" parTransId="{A7529454-20CE-4323-B50D-70587E64BF8D}" sibTransId="{571A5B9B-A753-4F39-9718-20F8F03F813A}"/>
+    <dgm:cxn modelId="{6E882093-C226-4871-B46C-1B2960D00988}" type="presOf" srcId="{3E033CD6-1D60-4A57-87DC-C4D5C83BA54C}" destId="{E45BD07B-E675-401A-BC69-D39BB7778087}" srcOrd="0" destOrd="0" presId="urn:microsoft.com/office/officeart/2005/8/layout/default"/>
     <dgm:cxn modelId="{13D180A4-30A3-477C-A2CC-D945477E42B2}" srcId="{9715B7D8-928C-426A-B475-4DF38CFE8C5B}" destId="{3C097E88-D424-4A2A-9DF9-1EB9D3DB1A00}" srcOrd="6" destOrd="0" parTransId="{7A855ACE-F751-410E-81DE-36EF8FCE8A04}" sibTransId="{ACB7B37F-C199-4B21-866A-43663209FB5E}"/>
     <dgm:cxn modelId="{70E8ACA8-5B55-427C-916E-B7D06548510F}" srcId="{9715B7D8-928C-426A-B475-4DF38CFE8C5B}" destId="{1B3247D7-F395-4526-94DE-4658E5C35501}" srcOrd="5" destOrd="0" parTransId="{FBB8039D-D0A1-4603-81DF-7116F16D4318}" sibTransId="{9B6237EB-F37F-45B0-963E-2369D74FF878}"/>
     <dgm:cxn modelId="{4FC008AC-6287-4547-A6C7-BA8062071D50}" srcId="{9715B7D8-928C-426A-B475-4DF38CFE8C5B}" destId="{143DBCD2-604E-49AD-AF47-EA4451C2766E}" srcOrd="3" destOrd="0" parTransId="{23D3F63B-1969-4935-AC54-12EF477F1AE3}" sibTransId="{7C1B8F38-F9F0-45E6-85F0-F12DD242F0FD}"/>
-    <dgm:cxn modelId="{B88634B4-E24E-4275-9AFF-F45DB8B08488}" type="presOf" srcId="{F076E82E-AB8B-4F8A-B496-E41F64E4AA9D}" destId="{A97B010E-89D0-431F-BDBA-7E3168873D2A}" srcOrd="0" destOrd="0" presId="urn:microsoft.com/office/officeart/2005/8/layout/default"/>
-    <dgm:cxn modelId="{FF49D9BF-84D5-475C-A4B3-60F38FB75C69}" type="presOf" srcId="{5DFC3C75-4307-46E1-BFD0-31E90368402C}" destId="{2B393AAD-0675-48D8-BAB3-9C08A9F6BD4D}" srcOrd="0" destOrd="0" presId="urn:microsoft.com/office/officeart/2005/8/layout/default"/>
+    <dgm:cxn modelId="{AEB500B7-8D06-49B3-B13B-D869A01494D7}" type="presOf" srcId="{3C097E88-D424-4A2A-9DF9-1EB9D3DB1A00}" destId="{8DCF91ED-0B2B-4E36-B905-53C3765FC7A0}" srcOrd="0" destOrd="0" presId="urn:microsoft.com/office/officeart/2005/8/layout/default"/>
+    <dgm:cxn modelId="{D750CDB7-29CE-4489-987A-2BF7D2ECCA6F}" type="presOf" srcId="{1B3247D7-F395-4526-94DE-4658E5C35501}" destId="{7641B0FE-5465-49ED-BA37-8824287DA745}" srcOrd="0" destOrd="0" presId="urn:microsoft.com/office/officeart/2005/8/layout/default"/>
     <dgm:cxn modelId="{D2781FC4-96BF-4502-AC63-E3C5CB999BA0}" srcId="{9715B7D8-928C-426A-B475-4DF38CFE8C5B}" destId="{F076E82E-AB8B-4F8A-B496-E41F64E4AA9D}" srcOrd="4" destOrd="0" parTransId="{B36C9221-12AB-46F7-97CE-9BC50A1C1519}" sibTransId="{6F1A7ACA-2531-4DB7-BFA4-E4B124279AB2}"/>
-    <dgm:cxn modelId="{E63719D7-9124-441D-973A-F2E6782FF02D}" type="presOf" srcId="{1B3247D7-F395-4526-94DE-4658E5C35501}" destId="{7641B0FE-5465-49ED-BA37-8824287DA745}" srcOrd="0" destOrd="0" presId="urn:microsoft.com/office/officeart/2005/8/layout/default"/>
-    <dgm:cxn modelId="{D0CDB3D8-72A7-41CC-A397-FD5002DB065B}" type="presOf" srcId="{143DBCD2-604E-49AD-AF47-EA4451C2766E}" destId="{8889BB9F-CF2F-4254-87DD-5D1E5EB686AA}" srcOrd="0" destOrd="0" presId="urn:microsoft.com/office/officeart/2005/8/layout/default"/>
+    <dgm:cxn modelId="{D9C44ECB-07CF-4915-AAC7-9105586428FF}" type="presOf" srcId="{979B3400-130B-493D-BC38-04D698DFEA6B}" destId="{50E97F52-9028-4251-9FB9-64AB05CA14EB}" srcOrd="0" destOrd="0" presId="urn:microsoft.com/office/officeart/2005/8/layout/default"/>
+    <dgm:cxn modelId="{FB8A12D0-6F45-4853-8A7B-ADC70EC7F4E4}" type="presOf" srcId="{1BB58C00-0717-4757-B97A-822FCB7CF1E4}" destId="{9902F2A7-BDBF-4AC6-B5DF-4186CACAB1DB}" srcOrd="0" destOrd="0" presId="urn:microsoft.com/office/officeart/2005/8/layout/default"/>
+    <dgm:cxn modelId="{ABC97DD4-5ECB-43ED-99A4-5ED49694E7F1}" type="presOf" srcId="{143DBCD2-604E-49AD-AF47-EA4451C2766E}" destId="{8889BB9F-CF2F-4254-87DD-5D1E5EB686AA}" srcOrd="0" destOrd="0" presId="urn:microsoft.com/office/officeart/2005/8/layout/default"/>
+    <dgm:cxn modelId="{AD9905E1-09BB-4F83-8D8E-CA06F0D003A2}" type="presOf" srcId="{201C1BB5-B33D-4420-BB6E-88E5220FA8B7}" destId="{9A876780-72B7-4005-8E9C-A62DF4AAE3EB}" srcOrd="0" destOrd="0" presId="urn:microsoft.com/office/officeart/2005/8/layout/default"/>
     <dgm:cxn modelId="{8B8750E9-5221-4DBB-8282-4E5CC342422D}" srcId="{9715B7D8-928C-426A-B475-4DF38CFE8C5B}" destId="{5734A286-2148-41EB-A0E1-8F3896B4EFB7}" srcOrd="0" destOrd="0" parTransId="{5737096F-AA45-4F4B-8332-7563C1D6F338}" sibTransId="{1E3CBF49-FA9E-418A-9723-E8E38844DADE}"/>
-    <dgm:cxn modelId="{3E03562F-C796-4B89-AF20-502865125FE1}" type="presParOf" srcId="{6A67CA82-7CB7-4DB5-BC7F-A3723519ED87}" destId="{6B52F8D2-8F53-4630-AA25-FB723B70E835}" srcOrd="0" destOrd="0" presId="urn:microsoft.com/office/officeart/2005/8/layout/default"/>
-    <dgm:cxn modelId="{57880F67-FE0B-4471-82CF-76AE31C36F7B}" type="presParOf" srcId="{6A67CA82-7CB7-4DB5-BC7F-A3723519ED87}" destId="{27AA8046-25DC-45D5-8630-FFB1AD66984D}" srcOrd="1" destOrd="0" presId="urn:microsoft.com/office/officeart/2005/8/layout/default"/>
-    <dgm:cxn modelId="{149F45C6-1BC3-460E-B7D5-D4BC02C1F3BF}" type="presParOf" srcId="{6A67CA82-7CB7-4DB5-BC7F-A3723519ED87}" destId="{E45BD07B-E675-401A-BC69-D39BB7778087}" srcOrd="2" destOrd="0" presId="urn:microsoft.com/office/officeart/2005/8/layout/default"/>
-    <dgm:cxn modelId="{007B0A22-37DD-4158-B61F-5891992485DF}" type="presParOf" srcId="{6A67CA82-7CB7-4DB5-BC7F-A3723519ED87}" destId="{5FEE924F-6A82-4F42-9FC4-783D9CFC15C2}" srcOrd="3" destOrd="0" presId="urn:microsoft.com/office/officeart/2005/8/layout/default"/>
-    <dgm:cxn modelId="{52686402-6FFF-4ED1-90A7-8ED5C68DABE8}" type="presParOf" srcId="{6A67CA82-7CB7-4DB5-BC7F-A3723519ED87}" destId="{2B393AAD-0675-48D8-BAB3-9C08A9F6BD4D}" srcOrd="4" destOrd="0" presId="urn:microsoft.com/office/officeart/2005/8/layout/default"/>
-    <dgm:cxn modelId="{9D0F5D25-5424-40DF-8E7E-003A20356797}" type="presParOf" srcId="{6A67CA82-7CB7-4DB5-BC7F-A3723519ED87}" destId="{B20BF595-C951-4B51-96A5-AA0FDBEFE253}" srcOrd="5" destOrd="0" presId="urn:microsoft.com/office/officeart/2005/8/layout/default"/>
-    <dgm:cxn modelId="{1F1A9E3E-4F57-49DD-84EA-49D083AA0FB6}" type="presParOf" srcId="{6A67CA82-7CB7-4DB5-BC7F-A3723519ED87}" destId="{8889BB9F-CF2F-4254-87DD-5D1E5EB686AA}" srcOrd="6" destOrd="0" presId="urn:microsoft.com/office/officeart/2005/8/layout/default"/>
-    <dgm:cxn modelId="{B2B7E8D9-53F4-4115-BC32-22ABF27859D1}" type="presParOf" srcId="{6A67CA82-7CB7-4DB5-BC7F-A3723519ED87}" destId="{097AC19C-16FE-40DC-8DB5-B203657235F2}" srcOrd="7" destOrd="0" presId="urn:microsoft.com/office/officeart/2005/8/layout/default"/>
-    <dgm:cxn modelId="{482834EC-A41A-4439-8A20-8B5F9CAA60AD}" type="presParOf" srcId="{6A67CA82-7CB7-4DB5-BC7F-A3723519ED87}" destId="{A97B010E-89D0-431F-BDBA-7E3168873D2A}" srcOrd="8" destOrd="0" presId="urn:microsoft.com/office/officeart/2005/8/layout/default"/>
-    <dgm:cxn modelId="{7EA0DA4A-9007-44B3-BF06-F987DA0B1C2E}" type="presParOf" srcId="{6A67CA82-7CB7-4DB5-BC7F-A3723519ED87}" destId="{4D572EF5-AFED-4FF6-88ED-60691FA4EDE6}" srcOrd="9" destOrd="0" presId="urn:microsoft.com/office/officeart/2005/8/layout/default"/>
-    <dgm:cxn modelId="{AE0F4C56-420E-415A-B211-218450CB8673}" type="presParOf" srcId="{6A67CA82-7CB7-4DB5-BC7F-A3723519ED87}" destId="{7641B0FE-5465-49ED-BA37-8824287DA745}" srcOrd="10" destOrd="0" presId="urn:microsoft.com/office/officeart/2005/8/layout/default"/>
-    <dgm:cxn modelId="{69F4C4A2-C18C-49EB-894D-D75A58EB6707}" type="presParOf" srcId="{6A67CA82-7CB7-4DB5-BC7F-A3723519ED87}" destId="{C93D718F-C562-41BA-AD41-6D2C9BD60DD5}" srcOrd="11" destOrd="0" presId="urn:microsoft.com/office/officeart/2005/8/layout/default"/>
-    <dgm:cxn modelId="{CD2D361E-728B-4BAD-9B37-706AE0B0F356}" type="presParOf" srcId="{6A67CA82-7CB7-4DB5-BC7F-A3723519ED87}" destId="{8DCF91ED-0B2B-4E36-B905-53C3765FC7A0}" srcOrd="12" destOrd="0" presId="urn:microsoft.com/office/officeart/2005/8/layout/default"/>
+    <dgm:cxn modelId="{932C32FD-9FBA-4DAC-A8E8-F0CF6970E999}" srcId="{9715B7D8-928C-426A-B475-4DF38CFE8C5B}" destId="{979B3400-130B-493D-BC38-04D698DFEA6B}" srcOrd="9" destOrd="0" parTransId="{2086B25A-4E07-441F-99DA-E83F41927D72}" sibTransId="{5FCCD772-2FC0-42E6-97C6-78FFBF2FACDE}"/>
+    <dgm:cxn modelId="{A0485243-0AB9-44E1-B928-97B25D8FF516}" type="presParOf" srcId="{6A67CA82-7CB7-4DB5-BC7F-A3723519ED87}" destId="{6B52F8D2-8F53-4630-AA25-FB723B70E835}" srcOrd="0" destOrd="0" presId="urn:microsoft.com/office/officeart/2005/8/layout/default"/>
+    <dgm:cxn modelId="{FE9E4179-4D25-402B-B277-13195D283C85}" type="presParOf" srcId="{6A67CA82-7CB7-4DB5-BC7F-A3723519ED87}" destId="{27AA8046-25DC-45D5-8630-FFB1AD66984D}" srcOrd="1" destOrd="0" presId="urn:microsoft.com/office/officeart/2005/8/layout/default"/>
+    <dgm:cxn modelId="{99E1BECF-F9C8-490E-BB44-6A432D9FB9C5}" type="presParOf" srcId="{6A67CA82-7CB7-4DB5-BC7F-A3723519ED87}" destId="{E45BD07B-E675-401A-BC69-D39BB7778087}" srcOrd="2" destOrd="0" presId="urn:microsoft.com/office/officeart/2005/8/layout/default"/>
+    <dgm:cxn modelId="{58B4D253-878B-4F09-B2AD-595C28B0572D}" type="presParOf" srcId="{6A67CA82-7CB7-4DB5-BC7F-A3723519ED87}" destId="{5FEE924F-6A82-4F42-9FC4-783D9CFC15C2}" srcOrd="3" destOrd="0" presId="urn:microsoft.com/office/officeart/2005/8/layout/default"/>
+    <dgm:cxn modelId="{311E9820-F400-4EF7-9ECC-CC5EE9CDD3A9}" type="presParOf" srcId="{6A67CA82-7CB7-4DB5-BC7F-A3723519ED87}" destId="{2B393AAD-0675-48D8-BAB3-9C08A9F6BD4D}" srcOrd="4" destOrd="0" presId="urn:microsoft.com/office/officeart/2005/8/layout/default"/>
+    <dgm:cxn modelId="{D8FF2680-0B14-4EA0-B28A-DC16D18DAEBB}" type="presParOf" srcId="{6A67CA82-7CB7-4DB5-BC7F-A3723519ED87}" destId="{B20BF595-C951-4B51-96A5-AA0FDBEFE253}" srcOrd="5" destOrd="0" presId="urn:microsoft.com/office/officeart/2005/8/layout/default"/>
+    <dgm:cxn modelId="{F713C0EE-F249-4D43-B52B-37F99BF5EC7B}" type="presParOf" srcId="{6A67CA82-7CB7-4DB5-BC7F-A3723519ED87}" destId="{8889BB9F-CF2F-4254-87DD-5D1E5EB686AA}" srcOrd="6" destOrd="0" presId="urn:microsoft.com/office/officeart/2005/8/layout/default"/>
+    <dgm:cxn modelId="{CCEB8BBC-94C8-4025-8CFA-3266AB55ADE1}" type="presParOf" srcId="{6A67CA82-7CB7-4DB5-BC7F-A3723519ED87}" destId="{097AC19C-16FE-40DC-8DB5-B203657235F2}" srcOrd="7" destOrd="0" presId="urn:microsoft.com/office/officeart/2005/8/layout/default"/>
+    <dgm:cxn modelId="{8730EBD3-A89E-450D-95DA-B0676DFF860A}" type="presParOf" srcId="{6A67CA82-7CB7-4DB5-BC7F-A3723519ED87}" destId="{A97B010E-89D0-431F-BDBA-7E3168873D2A}" srcOrd="8" destOrd="0" presId="urn:microsoft.com/office/officeart/2005/8/layout/default"/>
+    <dgm:cxn modelId="{220AB23E-5195-4462-B3FF-DD961DDEADFF}" type="presParOf" srcId="{6A67CA82-7CB7-4DB5-BC7F-A3723519ED87}" destId="{4D572EF5-AFED-4FF6-88ED-60691FA4EDE6}" srcOrd="9" destOrd="0" presId="urn:microsoft.com/office/officeart/2005/8/layout/default"/>
+    <dgm:cxn modelId="{430F22EA-2549-4DD8-BFA5-7A23D25357BD}" type="presParOf" srcId="{6A67CA82-7CB7-4DB5-BC7F-A3723519ED87}" destId="{7641B0FE-5465-49ED-BA37-8824287DA745}" srcOrd="10" destOrd="0" presId="urn:microsoft.com/office/officeart/2005/8/layout/default"/>
+    <dgm:cxn modelId="{3778970A-4395-4D4A-A09B-ADDDB7DD09C0}" type="presParOf" srcId="{6A67CA82-7CB7-4DB5-BC7F-A3723519ED87}" destId="{C93D718F-C562-41BA-AD41-6D2C9BD60DD5}" srcOrd="11" destOrd="0" presId="urn:microsoft.com/office/officeart/2005/8/layout/default"/>
+    <dgm:cxn modelId="{D272E9BA-A57B-44F8-BC4E-AA88A8B97716}" type="presParOf" srcId="{6A67CA82-7CB7-4DB5-BC7F-A3723519ED87}" destId="{8DCF91ED-0B2B-4E36-B905-53C3765FC7A0}" srcOrd="12" destOrd="0" presId="urn:microsoft.com/office/officeart/2005/8/layout/default"/>
+    <dgm:cxn modelId="{1EA63A62-F3B2-41A2-85A8-ADD7D45B5BA8}" type="presParOf" srcId="{6A67CA82-7CB7-4DB5-BC7F-A3723519ED87}" destId="{23A42582-C346-44A7-B848-2C26616EE192}" srcOrd="13" destOrd="0" presId="urn:microsoft.com/office/officeart/2005/8/layout/default"/>
+    <dgm:cxn modelId="{09003312-9ABA-4D1E-9924-932C382DD51D}" type="presParOf" srcId="{6A67CA82-7CB7-4DB5-BC7F-A3723519ED87}" destId="{9902F2A7-BDBF-4AC6-B5DF-4186CACAB1DB}" srcOrd="14" destOrd="0" presId="urn:microsoft.com/office/officeart/2005/8/layout/default"/>
+    <dgm:cxn modelId="{0549C2D4-34BC-414A-9AF1-D3AA33AD5164}" type="presParOf" srcId="{6A67CA82-7CB7-4DB5-BC7F-A3723519ED87}" destId="{A768CF93-1356-48FD-BD2D-A1A2FB41B877}" srcOrd="15" destOrd="0" presId="urn:microsoft.com/office/officeart/2005/8/layout/default"/>
+    <dgm:cxn modelId="{2BA57038-4FF2-4990-A005-38902B2F4EB4}" type="presParOf" srcId="{6A67CA82-7CB7-4DB5-BC7F-A3723519ED87}" destId="{9A876780-72B7-4005-8E9C-A62DF4AAE3EB}" srcOrd="16" destOrd="0" presId="urn:microsoft.com/office/officeart/2005/8/layout/default"/>
+    <dgm:cxn modelId="{110E59D6-DD5D-4F3E-8318-D88DEC78B95E}" type="presParOf" srcId="{6A67CA82-7CB7-4DB5-BC7F-A3723519ED87}" destId="{1B2DF3C1-4E17-4D9A-8262-6C40C08BF4DF}" srcOrd="17" destOrd="0" presId="urn:microsoft.com/office/officeart/2005/8/layout/default"/>
+    <dgm:cxn modelId="{0D502529-9CD8-4BB2-BAC2-7BE18D9EF4DC}" type="presParOf" srcId="{6A67CA82-7CB7-4DB5-BC7F-A3723519ED87}" destId="{50E97F52-9028-4251-9FB9-64AB05CA14EB}" srcOrd="18" destOrd="0" presId="urn:microsoft.com/office/officeart/2005/8/layout/default"/>
   </dgm:cxnLst>
   <dgm:bg/>
   <dgm:whole/>
@@ -3608,9 +3790,10 @@
         <a:lstStyle/>
         <a:p>
           <a:r>
-            <a:rPr lang="en-US" dirty="0"/>
+            <a:rPr lang="en-US"/>
             <a:t>Window</a:t>
           </a:r>
+          <a:endParaRPr lang="en-US" dirty="0"/>
         </a:p>
       </dgm:t>
     </dgm:pt>
@@ -3626,43 +3809,6 @@
       </dgm:t>
     </dgm:pt>
     <dgm:pt modelId="{7C1B8F38-F9F0-45E6-85F0-F12DD242F0FD}" type="sibTrans" cxnId="{4FC008AC-6287-4547-A6C7-BA8062071D50}">
-      <dgm:prSet/>
-      <dgm:spPr/>
-      <dgm:t>
-        <a:bodyPr/>
-        <a:lstStyle/>
-        <a:p>
-          <a:endParaRPr lang="en-US"/>
-        </a:p>
-      </dgm:t>
-    </dgm:pt>
-    <dgm:pt modelId="{F076E82E-AB8B-4F8A-B496-E41F64E4AA9D}">
-      <dgm:prSet phldrT="[Tekst]"/>
-      <dgm:spPr/>
-      <dgm:t>
-        <a:bodyPr/>
-        <a:lstStyle/>
-        <a:p>
-          <a:r>
-            <a:rPr lang="en-US" dirty="0" err="1"/>
-            <a:t>Swapchain</a:t>
-          </a:r>
-          <a:endParaRPr lang="en-US" dirty="0"/>
-        </a:p>
-      </dgm:t>
-    </dgm:pt>
-    <dgm:pt modelId="{B36C9221-12AB-46F7-97CE-9BC50A1C1519}" type="parTrans" cxnId="{D2781FC4-96BF-4502-AC63-E3C5CB999BA0}">
-      <dgm:prSet/>
-      <dgm:spPr/>
-      <dgm:t>
-        <a:bodyPr/>
-        <a:lstStyle/>
-        <a:p>
-          <a:endParaRPr lang="en-US"/>
-        </a:p>
-      </dgm:t>
-    </dgm:pt>
-    <dgm:pt modelId="{6F1A7ACA-2531-4DB7-BFA4-E4B124279AB2}" type="sibTrans" cxnId="{D2781FC4-96BF-4502-AC63-E3C5CB999BA0}">
       <dgm:prSet/>
       <dgm:spPr/>
       <dgm:t>
@@ -3791,7 +3937,7 @@
       <dgm:spPr/>
     </dgm:pt>
     <dgm:pt modelId="{6B52F8D2-8F53-4630-AA25-FB723B70E835}" type="pres">
-      <dgm:prSet presAssocID="{5734A286-2148-41EB-A0E1-8F3896B4EFB7}" presName="node" presStyleLbl="node1" presStyleIdx="0" presStyleCnt="7">
+      <dgm:prSet presAssocID="{5734A286-2148-41EB-A0E1-8F3896B4EFB7}" presName="node" presStyleLbl="node1" presStyleIdx="0" presStyleCnt="6">
         <dgm:presLayoutVars>
           <dgm:bulletEnabled val="1"/>
         </dgm:presLayoutVars>
@@ -3803,7 +3949,7 @@
       <dgm:spPr/>
     </dgm:pt>
     <dgm:pt modelId="{E45BD07B-E675-401A-BC69-D39BB7778087}" type="pres">
-      <dgm:prSet presAssocID="{3E033CD6-1D60-4A57-87DC-C4D5C83BA54C}" presName="node" presStyleLbl="node1" presStyleIdx="1" presStyleCnt="7">
+      <dgm:prSet presAssocID="{3E033CD6-1D60-4A57-87DC-C4D5C83BA54C}" presName="node" presStyleLbl="node1" presStyleIdx="1" presStyleCnt="6">
         <dgm:presLayoutVars>
           <dgm:bulletEnabled val="1"/>
         </dgm:presLayoutVars>
@@ -3815,7 +3961,7 @@
       <dgm:spPr/>
     </dgm:pt>
     <dgm:pt modelId="{2B393AAD-0675-48D8-BAB3-9C08A9F6BD4D}" type="pres">
-      <dgm:prSet presAssocID="{5DFC3C75-4307-46E1-BFD0-31E90368402C}" presName="node" presStyleLbl="node1" presStyleIdx="2" presStyleCnt="7">
+      <dgm:prSet presAssocID="{5DFC3C75-4307-46E1-BFD0-31E90368402C}" presName="node" presStyleLbl="node1" presStyleIdx="2" presStyleCnt="6">
         <dgm:presLayoutVars>
           <dgm:bulletEnabled val="1"/>
         </dgm:presLayoutVars>
@@ -3827,7 +3973,7 @@
       <dgm:spPr/>
     </dgm:pt>
     <dgm:pt modelId="{8889BB9F-CF2F-4254-87DD-5D1E5EB686AA}" type="pres">
-      <dgm:prSet presAssocID="{143DBCD2-604E-49AD-AF47-EA4451C2766E}" presName="node" presStyleLbl="node1" presStyleIdx="3" presStyleCnt="7">
+      <dgm:prSet presAssocID="{143DBCD2-604E-49AD-AF47-EA4451C2766E}" presName="node" presStyleLbl="node1" presStyleIdx="3" presStyleCnt="6">
         <dgm:presLayoutVars>
           <dgm:bulletEnabled val="1"/>
         </dgm:presLayoutVars>
@@ -3838,20 +3984,8 @@
       <dgm:prSet presAssocID="{7C1B8F38-F9F0-45E6-85F0-F12DD242F0FD}" presName="sibTrans" presStyleCnt="0"/>
       <dgm:spPr/>
     </dgm:pt>
-    <dgm:pt modelId="{A97B010E-89D0-431F-BDBA-7E3168873D2A}" type="pres">
-      <dgm:prSet presAssocID="{F076E82E-AB8B-4F8A-B496-E41F64E4AA9D}" presName="node" presStyleLbl="node1" presStyleIdx="4" presStyleCnt="7">
-        <dgm:presLayoutVars>
-          <dgm:bulletEnabled val="1"/>
-        </dgm:presLayoutVars>
-      </dgm:prSet>
-      <dgm:spPr/>
-    </dgm:pt>
-    <dgm:pt modelId="{4D572EF5-AFED-4FF6-88ED-60691FA4EDE6}" type="pres">
-      <dgm:prSet presAssocID="{6F1A7ACA-2531-4DB7-BFA4-E4B124279AB2}" presName="sibTrans" presStyleCnt="0"/>
-      <dgm:spPr/>
-    </dgm:pt>
     <dgm:pt modelId="{7641B0FE-5465-49ED-BA37-8824287DA745}" type="pres">
-      <dgm:prSet presAssocID="{1B3247D7-F395-4526-94DE-4658E5C35501}" presName="node" presStyleLbl="node1" presStyleIdx="5" presStyleCnt="7">
+      <dgm:prSet presAssocID="{1B3247D7-F395-4526-94DE-4658E5C35501}" presName="node" presStyleLbl="node1" presStyleIdx="4" presStyleCnt="6">
         <dgm:presLayoutVars>
           <dgm:bulletEnabled val="1"/>
         </dgm:presLayoutVars>
@@ -3863,7 +3997,7 @@
       <dgm:spPr/>
     </dgm:pt>
     <dgm:pt modelId="{8DCF91ED-0B2B-4E36-B905-53C3765FC7A0}" type="pres">
-      <dgm:prSet presAssocID="{3C097E88-D424-4A2A-9DF9-1EB9D3DB1A00}" presName="node" presStyleLbl="node1" presStyleIdx="6" presStyleCnt="7">
+      <dgm:prSet presAssocID="{3C097E88-D424-4A2A-9DF9-1EB9D3DB1A00}" presName="node" presStyleLbl="node1" presStyleIdx="5" presStyleCnt="6">
         <dgm:presLayoutVars>
           <dgm:bulletEnabled val="1"/>
         </dgm:presLayoutVars>
@@ -3878,12 +4012,10 @@
     <dgm:cxn modelId="{04564A1C-1E54-41CF-BAF1-352EC2FB44BD}" srcId="{9715B7D8-928C-426A-B475-4DF38CFE8C5B}" destId="{3E033CD6-1D60-4A57-87DC-C4D5C83BA54C}" srcOrd="1" destOrd="0" parTransId="{DB7F1F37-D4EB-4FE6-B7FF-312D9E0D9B5C}" sibTransId="{26088B7A-FE53-4397-87C3-2DF47BE5238A}"/>
     <dgm:cxn modelId="{2E386E3C-514B-4CF4-ABF2-923FE8AFEC84}" type="presOf" srcId="{3E033CD6-1D60-4A57-87DC-C4D5C83BA54C}" destId="{E45BD07B-E675-401A-BC69-D39BB7778087}" srcOrd="0" destOrd="0" presId="urn:microsoft.com/office/officeart/2005/8/layout/default"/>
     <dgm:cxn modelId="{422CAF7C-4974-4FBB-BFF0-D113A60B081D}" type="presOf" srcId="{5734A286-2148-41EB-A0E1-8F3896B4EFB7}" destId="{6B52F8D2-8F53-4630-AA25-FB723B70E835}" srcOrd="0" destOrd="0" presId="urn:microsoft.com/office/officeart/2005/8/layout/default"/>
-    <dgm:cxn modelId="{13D180A4-30A3-477C-A2CC-D945477E42B2}" srcId="{9715B7D8-928C-426A-B475-4DF38CFE8C5B}" destId="{3C097E88-D424-4A2A-9DF9-1EB9D3DB1A00}" srcOrd="6" destOrd="0" parTransId="{7A855ACE-F751-410E-81DE-36EF8FCE8A04}" sibTransId="{ACB7B37F-C199-4B21-866A-43663209FB5E}"/>
-    <dgm:cxn modelId="{70E8ACA8-5B55-427C-916E-B7D06548510F}" srcId="{9715B7D8-928C-426A-B475-4DF38CFE8C5B}" destId="{1B3247D7-F395-4526-94DE-4658E5C35501}" srcOrd="5" destOrd="0" parTransId="{FBB8039D-D0A1-4603-81DF-7116F16D4318}" sibTransId="{9B6237EB-F37F-45B0-963E-2369D74FF878}"/>
+    <dgm:cxn modelId="{13D180A4-30A3-477C-A2CC-D945477E42B2}" srcId="{9715B7D8-928C-426A-B475-4DF38CFE8C5B}" destId="{3C097E88-D424-4A2A-9DF9-1EB9D3DB1A00}" srcOrd="5" destOrd="0" parTransId="{7A855ACE-F751-410E-81DE-36EF8FCE8A04}" sibTransId="{ACB7B37F-C199-4B21-866A-43663209FB5E}"/>
+    <dgm:cxn modelId="{70E8ACA8-5B55-427C-916E-B7D06548510F}" srcId="{9715B7D8-928C-426A-B475-4DF38CFE8C5B}" destId="{1B3247D7-F395-4526-94DE-4658E5C35501}" srcOrd="4" destOrd="0" parTransId="{FBB8039D-D0A1-4603-81DF-7116F16D4318}" sibTransId="{9B6237EB-F37F-45B0-963E-2369D74FF878}"/>
     <dgm:cxn modelId="{4FC008AC-6287-4547-A6C7-BA8062071D50}" srcId="{9715B7D8-928C-426A-B475-4DF38CFE8C5B}" destId="{143DBCD2-604E-49AD-AF47-EA4451C2766E}" srcOrd="3" destOrd="0" parTransId="{23D3F63B-1969-4935-AC54-12EF477F1AE3}" sibTransId="{7C1B8F38-F9F0-45E6-85F0-F12DD242F0FD}"/>
-    <dgm:cxn modelId="{B88634B4-E24E-4275-9AFF-F45DB8B08488}" type="presOf" srcId="{F076E82E-AB8B-4F8A-B496-E41F64E4AA9D}" destId="{A97B010E-89D0-431F-BDBA-7E3168873D2A}" srcOrd="0" destOrd="0" presId="urn:microsoft.com/office/officeart/2005/8/layout/default"/>
     <dgm:cxn modelId="{FF49D9BF-84D5-475C-A4B3-60F38FB75C69}" type="presOf" srcId="{5DFC3C75-4307-46E1-BFD0-31E90368402C}" destId="{2B393AAD-0675-48D8-BAB3-9C08A9F6BD4D}" srcOrd="0" destOrd="0" presId="urn:microsoft.com/office/officeart/2005/8/layout/default"/>
-    <dgm:cxn modelId="{D2781FC4-96BF-4502-AC63-E3C5CB999BA0}" srcId="{9715B7D8-928C-426A-B475-4DF38CFE8C5B}" destId="{F076E82E-AB8B-4F8A-B496-E41F64E4AA9D}" srcOrd="4" destOrd="0" parTransId="{B36C9221-12AB-46F7-97CE-9BC50A1C1519}" sibTransId="{6F1A7ACA-2531-4DB7-BFA4-E4B124279AB2}"/>
     <dgm:cxn modelId="{E63719D7-9124-441D-973A-F2E6782FF02D}" type="presOf" srcId="{1B3247D7-F395-4526-94DE-4658E5C35501}" destId="{7641B0FE-5465-49ED-BA37-8824287DA745}" srcOrd="0" destOrd="0" presId="urn:microsoft.com/office/officeart/2005/8/layout/default"/>
     <dgm:cxn modelId="{D0CDB3D8-72A7-41CC-A397-FD5002DB065B}" type="presOf" srcId="{143DBCD2-604E-49AD-AF47-EA4451C2766E}" destId="{8889BB9F-CF2F-4254-87DD-5D1E5EB686AA}" srcOrd="0" destOrd="0" presId="urn:microsoft.com/office/officeart/2005/8/layout/default"/>
     <dgm:cxn modelId="{8B8750E9-5221-4DBB-8282-4E5CC342422D}" srcId="{9715B7D8-928C-426A-B475-4DF38CFE8C5B}" destId="{5734A286-2148-41EB-A0E1-8F3896B4EFB7}" srcOrd="0" destOrd="0" parTransId="{5737096F-AA45-4F4B-8332-7563C1D6F338}" sibTransId="{1E3CBF49-FA9E-418A-9723-E8E38844DADE}"/>
@@ -3895,11 +4027,9 @@
     <dgm:cxn modelId="{9D0F5D25-5424-40DF-8E7E-003A20356797}" type="presParOf" srcId="{6A67CA82-7CB7-4DB5-BC7F-A3723519ED87}" destId="{B20BF595-C951-4B51-96A5-AA0FDBEFE253}" srcOrd="5" destOrd="0" presId="urn:microsoft.com/office/officeart/2005/8/layout/default"/>
     <dgm:cxn modelId="{1F1A9E3E-4F57-49DD-84EA-49D083AA0FB6}" type="presParOf" srcId="{6A67CA82-7CB7-4DB5-BC7F-A3723519ED87}" destId="{8889BB9F-CF2F-4254-87DD-5D1E5EB686AA}" srcOrd="6" destOrd="0" presId="urn:microsoft.com/office/officeart/2005/8/layout/default"/>
     <dgm:cxn modelId="{B2B7E8D9-53F4-4115-BC32-22ABF27859D1}" type="presParOf" srcId="{6A67CA82-7CB7-4DB5-BC7F-A3723519ED87}" destId="{097AC19C-16FE-40DC-8DB5-B203657235F2}" srcOrd="7" destOrd="0" presId="urn:microsoft.com/office/officeart/2005/8/layout/default"/>
-    <dgm:cxn modelId="{482834EC-A41A-4439-8A20-8B5F9CAA60AD}" type="presParOf" srcId="{6A67CA82-7CB7-4DB5-BC7F-A3723519ED87}" destId="{A97B010E-89D0-431F-BDBA-7E3168873D2A}" srcOrd="8" destOrd="0" presId="urn:microsoft.com/office/officeart/2005/8/layout/default"/>
-    <dgm:cxn modelId="{7EA0DA4A-9007-44B3-BF06-F987DA0B1C2E}" type="presParOf" srcId="{6A67CA82-7CB7-4DB5-BC7F-A3723519ED87}" destId="{4D572EF5-AFED-4FF6-88ED-60691FA4EDE6}" srcOrd="9" destOrd="0" presId="urn:microsoft.com/office/officeart/2005/8/layout/default"/>
-    <dgm:cxn modelId="{AE0F4C56-420E-415A-B211-218450CB8673}" type="presParOf" srcId="{6A67CA82-7CB7-4DB5-BC7F-A3723519ED87}" destId="{7641B0FE-5465-49ED-BA37-8824287DA745}" srcOrd="10" destOrd="0" presId="urn:microsoft.com/office/officeart/2005/8/layout/default"/>
-    <dgm:cxn modelId="{69F4C4A2-C18C-49EB-894D-D75A58EB6707}" type="presParOf" srcId="{6A67CA82-7CB7-4DB5-BC7F-A3723519ED87}" destId="{C93D718F-C562-41BA-AD41-6D2C9BD60DD5}" srcOrd="11" destOrd="0" presId="urn:microsoft.com/office/officeart/2005/8/layout/default"/>
-    <dgm:cxn modelId="{CD2D361E-728B-4BAD-9B37-706AE0B0F356}" type="presParOf" srcId="{6A67CA82-7CB7-4DB5-BC7F-A3723519ED87}" destId="{8DCF91ED-0B2B-4E36-B905-53C3765FC7A0}" srcOrd="12" destOrd="0" presId="urn:microsoft.com/office/officeart/2005/8/layout/default"/>
+    <dgm:cxn modelId="{AE0F4C56-420E-415A-B211-218450CB8673}" type="presParOf" srcId="{6A67CA82-7CB7-4DB5-BC7F-A3723519ED87}" destId="{7641B0FE-5465-49ED-BA37-8824287DA745}" srcOrd="8" destOrd="0" presId="urn:microsoft.com/office/officeart/2005/8/layout/default"/>
+    <dgm:cxn modelId="{69F4C4A2-C18C-49EB-894D-D75A58EB6707}" type="presParOf" srcId="{6A67CA82-7CB7-4DB5-BC7F-A3723519ED87}" destId="{C93D718F-C562-41BA-AD41-6D2C9BD60DD5}" srcOrd="9" destOrd="0" presId="urn:microsoft.com/office/officeart/2005/8/layout/default"/>
+    <dgm:cxn modelId="{CD2D361E-728B-4BAD-9B37-706AE0B0F356}" type="presParOf" srcId="{6A67CA82-7CB7-4DB5-BC7F-A3723519ED87}" destId="{8DCF91ED-0B2B-4E36-B905-53C3765FC7A0}" srcOrd="10" destOrd="0" presId="urn:microsoft.com/office/officeart/2005/8/layout/default"/>
   </dgm:cxnLst>
   <dgm:bg/>
   <dgm:whole/>
@@ -4511,8 +4641,8 @@
       </dsp:nvSpPr>
       <dsp:spPr>
         <a:xfrm>
-          <a:off x="206970" y="294"/>
-          <a:ext cx="1015007" cy="609004"/>
+          <a:off x="3835" y="21494"/>
+          <a:ext cx="944341" cy="566605"/>
         </a:xfrm>
         <a:prstGeom prst="rect">
           <a:avLst/>
@@ -4581,12 +4711,12 @@
         </a:fontRef>
       </dsp:style>
       <dsp:txBody>
-        <a:bodyPr spcFirstLastPara="0" vert="horz" wrap="square" lIns="60960" tIns="60960" rIns="60960" bIns="60960" numCol="1" spcCol="1270" anchor="ctr" anchorCtr="0">
+        <a:bodyPr spcFirstLastPara="0" vert="horz" wrap="square" lIns="38100" tIns="38100" rIns="38100" bIns="38100" numCol="1" spcCol="1270" anchor="ctr" anchorCtr="0">
           <a:noAutofit/>
         </a:bodyPr>
         <a:lstStyle/>
         <a:p>
-          <a:pPr marL="0" lvl="0" indent="0" algn="ctr" defTabSz="711200">
+          <a:pPr marL="0" lvl="0" indent="0" algn="ctr" defTabSz="444500">
             <a:lnSpc>
               <a:spcPct val="90000"/>
             </a:lnSpc>
@@ -4599,14 +4729,14 @@
             <a:buNone/>
           </a:pPr>
           <a:r>
-            <a:rPr lang="en-US" sz="1600" kern="1200" dirty="0"/>
+            <a:rPr lang="en-US" sz="1000" kern="1200" dirty="0"/>
             <a:t>Logging</a:t>
           </a:r>
         </a:p>
       </dsp:txBody>
       <dsp:txXfrm>
-        <a:off x="206970" y="294"/>
-        <a:ext cx="1015007" cy="609004"/>
+        <a:off x="3835" y="21494"/>
+        <a:ext cx="944341" cy="566605"/>
       </dsp:txXfrm>
     </dsp:sp>
     <dsp:sp modelId="{E45BD07B-E675-401A-BC69-D39BB7778087}">
@@ -4616,8 +4746,8 @@
       </dsp:nvSpPr>
       <dsp:spPr>
         <a:xfrm>
-          <a:off x="1323478" y="294"/>
-          <a:ext cx="1015007" cy="609004"/>
+          <a:off x="1042611" y="21494"/>
+          <a:ext cx="944341" cy="566605"/>
         </a:xfrm>
         <a:prstGeom prst="rect">
           <a:avLst/>
@@ -4686,12 +4816,12 @@
         </a:fontRef>
       </dsp:style>
       <dsp:txBody>
-        <a:bodyPr spcFirstLastPara="0" vert="horz" wrap="square" lIns="60960" tIns="60960" rIns="60960" bIns="60960" numCol="1" spcCol="1270" anchor="ctr" anchorCtr="0">
+        <a:bodyPr spcFirstLastPara="0" vert="horz" wrap="square" lIns="38100" tIns="38100" rIns="38100" bIns="38100" numCol="1" spcCol="1270" anchor="ctr" anchorCtr="0">
           <a:noAutofit/>
         </a:bodyPr>
         <a:lstStyle/>
         <a:p>
-          <a:pPr marL="0" lvl="0" indent="0" algn="ctr" defTabSz="711200">
+          <a:pPr marL="0" lvl="0" indent="0" algn="ctr" defTabSz="444500">
             <a:lnSpc>
               <a:spcPct val="90000"/>
             </a:lnSpc>
@@ -4704,14 +4834,14 @@
             <a:buNone/>
           </a:pPr>
           <a:r>
-            <a:rPr lang="en-US" sz="1600" kern="1200" dirty="0"/>
+            <a:rPr lang="en-US" sz="1000" kern="1200" dirty="0"/>
             <a:t>Utilities</a:t>
           </a:r>
         </a:p>
       </dsp:txBody>
       <dsp:txXfrm>
-        <a:off x="1323478" y="294"/>
-        <a:ext cx="1015007" cy="609004"/>
+        <a:off x="1042611" y="21494"/>
+        <a:ext cx="944341" cy="566605"/>
       </dsp:txXfrm>
     </dsp:sp>
     <dsp:sp modelId="{2B393AAD-0675-48D8-BAB3-9C08A9F6BD4D}">
@@ -4721,8 +4851,8 @@
       </dsp:nvSpPr>
       <dsp:spPr>
         <a:xfrm>
-          <a:off x="2439987" y="294"/>
-          <a:ext cx="1015007" cy="609004"/>
+          <a:off x="2081387" y="21494"/>
+          <a:ext cx="944341" cy="566605"/>
         </a:xfrm>
         <a:prstGeom prst="rect">
           <a:avLst/>
@@ -4791,12 +4921,12 @@
         </a:fontRef>
       </dsp:style>
       <dsp:txBody>
-        <a:bodyPr spcFirstLastPara="0" vert="horz" wrap="square" lIns="60960" tIns="60960" rIns="60960" bIns="60960" numCol="1" spcCol="1270" anchor="ctr" anchorCtr="0">
+        <a:bodyPr spcFirstLastPara="0" vert="horz" wrap="square" lIns="38100" tIns="38100" rIns="38100" bIns="38100" numCol="1" spcCol="1270" anchor="ctr" anchorCtr="0">
           <a:noAutofit/>
         </a:bodyPr>
         <a:lstStyle/>
         <a:p>
-          <a:pPr marL="0" lvl="0" indent="0" algn="ctr" defTabSz="711200">
+          <a:pPr marL="0" lvl="0" indent="0" algn="ctr" defTabSz="444500">
             <a:lnSpc>
               <a:spcPct val="90000"/>
             </a:lnSpc>
@@ -4809,14 +4939,14 @@
             <a:buNone/>
           </a:pPr>
           <a:r>
-            <a:rPr lang="en-US" sz="1600" kern="1200" dirty="0"/>
+            <a:rPr lang="en-US" sz="1000" kern="1200" dirty="0"/>
             <a:t>Enum struct</a:t>
           </a:r>
         </a:p>
       </dsp:txBody>
       <dsp:txXfrm>
-        <a:off x="2439987" y="294"/>
-        <a:ext cx="1015007" cy="609004"/>
+        <a:off x="2081387" y="21494"/>
+        <a:ext cx="944341" cy="566605"/>
       </dsp:txXfrm>
     </dsp:sp>
     <dsp:sp modelId="{8889BB9F-CF2F-4254-87DD-5D1E5EB686AA}">
@@ -4826,8 +4956,8 @@
       </dsp:nvSpPr>
       <dsp:spPr>
         <a:xfrm>
-          <a:off x="3556496" y="294"/>
-          <a:ext cx="1015007" cy="609004"/>
+          <a:off x="3120163" y="21494"/>
+          <a:ext cx="944341" cy="566605"/>
         </a:xfrm>
         <a:prstGeom prst="rect">
           <a:avLst/>
@@ -4896,12 +5026,12 @@
         </a:fontRef>
       </dsp:style>
       <dsp:txBody>
-        <a:bodyPr spcFirstLastPara="0" vert="horz" wrap="square" lIns="60960" tIns="60960" rIns="60960" bIns="60960" numCol="1" spcCol="1270" anchor="ctr" anchorCtr="0">
+        <a:bodyPr spcFirstLastPara="0" vert="horz" wrap="square" lIns="38100" tIns="38100" rIns="38100" bIns="38100" numCol="1" spcCol="1270" anchor="ctr" anchorCtr="0">
           <a:noAutofit/>
         </a:bodyPr>
         <a:lstStyle/>
         <a:p>
-          <a:pPr marL="0" lvl="0" indent="0" algn="ctr" defTabSz="711200">
+          <a:pPr marL="0" lvl="0" indent="0" algn="ctr" defTabSz="444500">
             <a:lnSpc>
               <a:spcPct val="90000"/>
             </a:lnSpc>
@@ -4914,14 +5044,14 @@
             <a:buNone/>
           </a:pPr>
           <a:r>
-            <a:rPr lang="en-US" sz="1600" kern="1200" dirty="0"/>
+            <a:rPr lang="en-US" sz="1000" kern="1200" dirty="0"/>
             <a:t>Math library</a:t>
           </a:r>
         </a:p>
       </dsp:txBody>
       <dsp:txXfrm>
-        <a:off x="3556496" y="294"/>
-        <a:ext cx="1015007" cy="609004"/>
+        <a:off x="3120163" y="21494"/>
+        <a:ext cx="944341" cy="566605"/>
       </dsp:txXfrm>
     </dsp:sp>
     <dsp:sp modelId="{A97B010E-89D0-431F-BDBA-7E3168873D2A}">
@@ -4931,8 +5061,8 @@
       </dsp:nvSpPr>
       <dsp:spPr>
         <a:xfrm>
-          <a:off x="4673004" y="294"/>
-          <a:ext cx="1015007" cy="609004"/>
+          <a:off x="4158939" y="21494"/>
+          <a:ext cx="944341" cy="566605"/>
         </a:xfrm>
         <a:prstGeom prst="rect">
           <a:avLst/>
@@ -5001,12 +5131,12 @@
         </a:fontRef>
       </dsp:style>
       <dsp:txBody>
-        <a:bodyPr spcFirstLastPara="0" vert="horz" wrap="square" lIns="60960" tIns="60960" rIns="60960" bIns="60960" numCol="1" spcCol="1270" anchor="ctr" anchorCtr="0">
+        <a:bodyPr spcFirstLastPara="0" vert="horz" wrap="square" lIns="38100" tIns="38100" rIns="38100" bIns="38100" numCol="1" spcCol="1270" anchor="ctr" anchorCtr="0">
           <a:noAutofit/>
         </a:bodyPr>
         <a:lstStyle/>
         <a:p>
-          <a:pPr marL="0" lvl="0" indent="0" algn="ctr" defTabSz="711200">
+          <a:pPr marL="0" lvl="0" indent="0" algn="ctr" defTabSz="444500">
             <a:lnSpc>
               <a:spcPct val="90000"/>
             </a:lnSpc>
@@ -5019,14 +5149,14 @@
             <a:buNone/>
           </a:pPr>
           <a:r>
-            <a:rPr lang="en-US" sz="1600" kern="1200" dirty="0"/>
+            <a:rPr lang="en-US" sz="1000" kern="1200" dirty="0"/>
             <a:t>Allocators</a:t>
           </a:r>
         </a:p>
       </dsp:txBody>
       <dsp:txXfrm>
-        <a:off x="4673004" y="294"/>
-        <a:ext cx="1015007" cy="609004"/>
+        <a:off x="4158939" y="21494"/>
+        <a:ext cx="944341" cy="566605"/>
       </dsp:txXfrm>
     </dsp:sp>
     <dsp:sp modelId="{7641B0FE-5465-49ED-BA37-8824287DA745}">
@@ -5036,8 +5166,8 @@
       </dsp:nvSpPr>
       <dsp:spPr>
         <a:xfrm>
-          <a:off x="5789513" y="294"/>
-          <a:ext cx="1015007" cy="609004"/>
+          <a:off x="5197715" y="21494"/>
+          <a:ext cx="944341" cy="566605"/>
         </a:xfrm>
         <a:prstGeom prst="rect">
           <a:avLst/>
@@ -5106,12 +5236,12 @@
         </a:fontRef>
       </dsp:style>
       <dsp:txBody>
-        <a:bodyPr spcFirstLastPara="0" vert="horz" wrap="square" lIns="60960" tIns="60960" rIns="60960" bIns="60960" numCol="1" spcCol="1270" anchor="ctr" anchorCtr="0">
+        <a:bodyPr spcFirstLastPara="0" vert="horz" wrap="square" lIns="38100" tIns="38100" rIns="38100" bIns="38100" numCol="1" spcCol="1270" anchor="ctr" anchorCtr="0">
           <a:noAutofit/>
         </a:bodyPr>
         <a:lstStyle/>
         <a:p>
-          <a:pPr marL="0" lvl="0" indent="0" algn="ctr" defTabSz="711200">
+          <a:pPr marL="0" lvl="0" indent="0" algn="ctr" defTabSz="444500">
             <a:lnSpc>
               <a:spcPct val="90000"/>
             </a:lnSpc>
@@ -5124,14 +5254,14 @@
             <a:buNone/>
           </a:pPr>
           <a:r>
-            <a:rPr lang="en-US" sz="1600" kern="1200" dirty="0"/>
+            <a:rPr lang="en-US" sz="1000" kern="1200" dirty="0"/>
             <a:t>Assertions</a:t>
           </a:r>
         </a:p>
       </dsp:txBody>
       <dsp:txXfrm>
-        <a:off x="5789513" y="294"/>
-        <a:ext cx="1015007" cy="609004"/>
+        <a:off x="5197715" y="21494"/>
+        <a:ext cx="944341" cy="566605"/>
       </dsp:txXfrm>
     </dsp:sp>
     <dsp:sp modelId="{8DCF91ED-0B2B-4E36-B905-53C3765FC7A0}">
@@ -5141,8 +5271,8 @@
       </dsp:nvSpPr>
       <dsp:spPr>
         <a:xfrm>
-          <a:off x="6906021" y="294"/>
-          <a:ext cx="1015007" cy="609004"/>
+          <a:off x="6236491" y="21494"/>
+          <a:ext cx="944341" cy="566605"/>
         </a:xfrm>
         <a:prstGeom prst="rect">
           <a:avLst/>
@@ -5211,12 +5341,12 @@
         </a:fontRef>
       </dsp:style>
       <dsp:txBody>
-        <a:bodyPr spcFirstLastPara="0" vert="horz" wrap="square" lIns="60960" tIns="60960" rIns="60960" bIns="60960" numCol="1" spcCol="1270" anchor="ctr" anchorCtr="0">
+        <a:bodyPr spcFirstLastPara="0" vert="horz" wrap="square" lIns="38100" tIns="38100" rIns="38100" bIns="38100" numCol="1" spcCol="1270" anchor="ctr" anchorCtr="0">
           <a:noAutofit/>
         </a:bodyPr>
         <a:lstStyle/>
         <a:p>
-          <a:pPr marL="0" lvl="0" indent="0" algn="ctr" defTabSz="711200">
+          <a:pPr marL="0" lvl="0" indent="0" algn="ctr" defTabSz="444500">
             <a:lnSpc>
               <a:spcPct val="90000"/>
             </a:lnSpc>
@@ -5229,14 +5359,355 @@
             <a:buNone/>
           </a:pPr>
           <a:r>
-            <a:rPr lang="en-US" sz="1600" kern="1200" dirty="0"/>
+            <a:rPr lang="en-US" sz="1000" kern="1200" dirty="0"/>
             <a:t>Profiling</a:t>
           </a:r>
         </a:p>
       </dsp:txBody>
       <dsp:txXfrm>
-        <a:off x="6906021" y="294"/>
-        <a:ext cx="1015007" cy="609004"/>
+        <a:off x="6236491" y="21494"/>
+        <a:ext cx="944341" cy="566605"/>
+      </dsp:txXfrm>
+    </dsp:sp>
+    <dsp:sp modelId="{9902F2A7-BDBF-4AC6-B5DF-4186CACAB1DB}">
+      <dsp:nvSpPr>
+        <dsp:cNvPr id="0" name=""/>
+        <dsp:cNvSpPr/>
+      </dsp:nvSpPr>
+      <dsp:spPr>
+        <a:xfrm>
+          <a:off x="7275267" y="21494"/>
+          <a:ext cx="944341" cy="566605"/>
+        </a:xfrm>
+        <a:prstGeom prst="rect">
+          <a:avLst/>
+        </a:prstGeom>
+        <a:gradFill rotWithShape="0">
+          <a:gsLst>
+            <a:gs pos="0">
+              <a:schemeClr val="accent1">
+                <a:hueOff val="0"/>
+                <a:satOff val="0"/>
+                <a:lumOff val="0"/>
+                <a:alphaOff val="0"/>
+                <a:satMod val="103000"/>
+                <a:lumMod val="102000"/>
+                <a:tint val="94000"/>
+              </a:schemeClr>
+            </a:gs>
+            <a:gs pos="50000">
+              <a:schemeClr val="accent1">
+                <a:hueOff val="0"/>
+                <a:satOff val="0"/>
+                <a:lumOff val="0"/>
+                <a:alphaOff val="0"/>
+                <a:satMod val="110000"/>
+                <a:lumMod val="100000"/>
+                <a:shade val="100000"/>
+              </a:schemeClr>
+            </a:gs>
+            <a:gs pos="100000">
+              <a:schemeClr val="accent1">
+                <a:hueOff val="0"/>
+                <a:satOff val="0"/>
+                <a:lumOff val="0"/>
+                <a:alphaOff val="0"/>
+                <a:lumMod val="99000"/>
+                <a:satMod val="120000"/>
+                <a:shade val="78000"/>
+              </a:schemeClr>
+            </a:gs>
+          </a:gsLst>
+          <a:lin ang="5400000" scaled="0"/>
+        </a:gradFill>
+        <a:ln>
+          <a:noFill/>
+        </a:ln>
+        <a:effectLst>
+          <a:outerShdw blurRad="57150" dist="19050" dir="5400000" algn="ctr" rotWithShape="0">
+            <a:srgbClr val="000000">
+              <a:alpha val="63000"/>
+            </a:srgbClr>
+          </a:outerShdw>
+        </a:effectLst>
+      </dsp:spPr>
+      <dsp:style>
+        <a:lnRef idx="0">
+          <a:scrgbClr r="0" g="0" b="0"/>
+        </a:lnRef>
+        <a:fillRef idx="3">
+          <a:scrgbClr r="0" g="0" b="0"/>
+        </a:fillRef>
+        <a:effectRef idx="3">
+          <a:scrgbClr r="0" g="0" b="0"/>
+        </a:effectRef>
+        <a:fontRef idx="minor">
+          <a:schemeClr val="lt1"/>
+        </a:fontRef>
+      </dsp:style>
+      <dsp:txBody>
+        <a:bodyPr spcFirstLastPara="0" vert="horz" wrap="square" lIns="38100" tIns="38100" rIns="38100" bIns="38100" numCol="1" spcCol="1270" anchor="ctr" anchorCtr="0">
+          <a:noAutofit/>
+        </a:bodyPr>
+        <a:lstStyle/>
+        <a:p>
+          <a:pPr marL="0" lvl="0" indent="0" algn="ctr" defTabSz="444500">
+            <a:lnSpc>
+              <a:spcPct val="90000"/>
+            </a:lnSpc>
+            <a:spcBef>
+              <a:spcPct val="0"/>
+            </a:spcBef>
+            <a:spcAft>
+              <a:spcPct val="35000"/>
+            </a:spcAft>
+            <a:buNone/>
+          </a:pPr>
+          <a:r>
+            <a:rPr lang="en-US" sz="1000" kern="1200" dirty="0"/>
+            <a:t>Splice &amp; Array</a:t>
+          </a:r>
+        </a:p>
+      </dsp:txBody>
+      <dsp:txXfrm>
+        <a:off x="7275267" y="21494"/>
+        <a:ext cx="944341" cy="566605"/>
+      </dsp:txXfrm>
+    </dsp:sp>
+    <dsp:sp modelId="{9A876780-72B7-4005-8E9C-A62DF4AAE3EB}">
+      <dsp:nvSpPr>
+        <dsp:cNvPr id="0" name=""/>
+        <dsp:cNvSpPr/>
+      </dsp:nvSpPr>
+      <dsp:spPr>
+        <a:xfrm>
+          <a:off x="8314043" y="21494"/>
+          <a:ext cx="944341" cy="566605"/>
+        </a:xfrm>
+        <a:prstGeom prst="rect">
+          <a:avLst/>
+        </a:prstGeom>
+        <a:gradFill rotWithShape="0">
+          <a:gsLst>
+            <a:gs pos="0">
+              <a:schemeClr val="accent1">
+                <a:hueOff val="0"/>
+                <a:satOff val="0"/>
+                <a:lumOff val="0"/>
+                <a:alphaOff val="0"/>
+                <a:satMod val="103000"/>
+                <a:lumMod val="102000"/>
+                <a:tint val="94000"/>
+              </a:schemeClr>
+            </a:gs>
+            <a:gs pos="50000">
+              <a:schemeClr val="accent1">
+                <a:hueOff val="0"/>
+                <a:satOff val="0"/>
+                <a:lumOff val="0"/>
+                <a:alphaOff val="0"/>
+                <a:satMod val="110000"/>
+                <a:lumMod val="100000"/>
+                <a:shade val="100000"/>
+              </a:schemeClr>
+            </a:gs>
+            <a:gs pos="100000">
+              <a:schemeClr val="accent1">
+                <a:hueOff val="0"/>
+                <a:satOff val="0"/>
+                <a:lumOff val="0"/>
+                <a:alphaOff val="0"/>
+                <a:lumMod val="99000"/>
+                <a:satMod val="120000"/>
+                <a:shade val="78000"/>
+              </a:schemeClr>
+            </a:gs>
+          </a:gsLst>
+          <a:lin ang="5400000" scaled="0"/>
+        </a:gradFill>
+        <a:ln>
+          <a:noFill/>
+        </a:ln>
+        <a:effectLst>
+          <a:outerShdw blurRad="57150" dist="19050" dir="5400000" algn="ctr" rotWithShape="0">
+            <a:srgbClr val="000000">
+              <a:alpha val="63000"/>
+            </a:srgbClr>
+          </a:outerShdw>
+        </a:effectLst>
+      </dsp:spPr>
+      <dsp:style>
+        <a:lnRef idx="0">
+          <a:scrgbClr r="0" g="0" b="0"/>
+        </a:lnRef>
+        <a:fillRef idx="3">
+          <a:scrgbClr r="0" g="0" b="0"/>
+        </a:fillRef>
+        <a:effectRef idx="3">
+          <a:scrgbClr r="0" g="0" b="0"/>
+        </a:effectRef>
+        <a:fontRef idx="minor">
+          <a:schemeClr val="lt1"/>
+        </a:fontRef>
+      </dsp:style>
+      <dsp:txBody>
+        <a:bodyPr spcFirstLastPara="0" vert="horz" wrap="square" lIns="38100" tIns="38100" rIns="38100" bIns="38100" numCol="1" spcCol="1270" anchor="ctr" anchorCtr="0">
+          <a:noAutofit/>
+        </a:bodyPr>
+        <a:lstStyle/>
+        <a:p>
+          <a:pPr marL="0" lvl="0" indent="0" algn="ctr" defTabSz="444500">
+            <a:lnSpc>
+              <a:spcPct val="90000"/>
+            </a:lnSpc>
+            <a:spcBef>
+              <a:spcPct val="0"/>
+            </a:spcBef>
+            <a:spcAft>
+              <a:spcPct val="35000"/>
+            </a:spcAft>
+            <a:buNone/>
+          </a:pPr>
+          <a:r>
+            <a:rPr lang="en-US" sz="1000" kern="1200" dirty="0" err="1"/>
+            <a:t>SpliceArena</a:t>
+          </a:r>
+          <a:r>
+            <a:rPr lang="en-US" sz="1000" kern="1200" dirty="0"/>
+            <a:t> &amp; </a:t>
+          </a:r>
+          <a:r>
+            <a:rPr lang="en-US" sz="1000" kern="1200" dirty="0" err="1"/>
+            <a:t>ArrayArena</a:t>
+          </a:r>
+          <a:endParaRPr lang="en-US" sz="1000" kern="1200" dirty="0"/>
+        </a:p>
+      </dsp:txBody>
+      <dsp:txXfrm>
+        <a:off x="8314043" y="21494"/>
+        <a:ext cx="944341" cy="566605"/>
+      </dsp:txXfrm>
+    </dsp:sp>
+    <dsp:sp modelId="{50E97F52-9028-4251-9FB9-64AB05CA14EB}">
+      <dsp:nvSpPr>
+        <dsp:cNvPr id="0" name=""/>
+        <dsp:cNvSpPr/>
+      </dsp:nvSpPr>
+      <dsp:spPr>
+        <a:xfrm>
+          <a:off x="9352818" y="21494"/>
+          <a:ext cx="944341" cy="566605"/>
+        </a:xfrm>
+        <a:prstGeom prst="rect">
+          <a:avLst/>
+        </a:prstGeom>
+        <a:gradFill rotWithShape="0">
+          <a:gsLst>
+            <a:gs pos="0">
+              <a:schemeClr val="accent1">
+                <a:hueOff val="0"/>
+                <a:satOff val="0"/>
+                <a:lumOff val="0"/>
+                <a:alphaOff val="0"/>
+                <a:satMod val="103000"/>
+                <a:lumMod val="102000"/>
+                <a:tint val="94000"/>
+              </a:schemeClr>
+            </a:gs>
+            <a:gs pos="50000">
+              <a:schemeClr val="accent1">
+                <a:hueOff val="0"/>
+                <a:satOff val="0"/>
+                <a:lumOff val="0"/>
+                <a:alphaOff val="0"/>
+                <a:satMod val="110000"/>
+                <a:lumMod val="100000"/>
+                <a:shade val="100000"/>
+              </a:schemeClr>
+            </a:gs>
+            <a:gs pos="100000">
+              <a:schemeClr val="accent1">
+                <a:hueOff val="0"/>
+                <a:satOff val="0"/>
+                <a:lumOff val="0"/>
+                <a:alphaOff val="0"/>
+                <a:lumMod val="99000"/>
+                <a:satMod val="120000"/>
+                <a:shade val="78000"/>
+              </a:schemeClr>
+            </a:gs>
+          </a:gsLst>
+          <a:lin ang="5400000" scaled="0"/>
+        </a:gradFill>
+        <a:ln>
+          <a:noFill/>
+        </a:ln>
+        <a:effectLst>
+          <a:outerShdw blurRad="57150" dist="19050" dir="5400000" algn="ctr" rotWithShape="0">
+            <a:srgbClr val="000000">
+              <a:alpha val="63000"/>
+            </a:srgbClr>
+          </a:outerShdw>
+        </a:effectLst>
+      </dsp:spPr>
+      <dsp:style>
+        <a:lnRef idx="0">
+          <a:scrgbClr r="0" g="0" b="0"/>
+        </a:lnRef>
+        <a:fillRef idx="3">
+          <a:scrgbClr r="0" g="0" b="0"/>
+        </a:fillRef>
+        <a:effectRef idx="3">
+          <a:scrgbClr r="0" g="0" b="0"/>
+        </a:effectRef>
+        <a:fontRef idx="minor">
+          <a:schemeClr val="lt1"/>
+        </a:fontRef>
+      </dsp:style>
+      <dsp:txBody>
+        <a:bodyPr spcFirstLastPara="0" vert="horz" wrap="square" lIns="38100" tIns="38100" rIns="38100" bIns="38100" numCol="1" spcCol="1270" anchor="ctr" anchorCtr="0">
+          <a:noAutofit/>
+        </a:bodyPr>
+        <a:lstStyle/>
+        <a:p>
+          <a:pPr marL="0" lvl="0" indent="0" algn="ctr" defTabSz="444500">
+            <a:lnSpc>
+              <a:spcPct val="90000"/>
+            </a:lnSpc>
+            <a:spcBef>
+              <a:spcPct val="0"/>
+            </a:spcBef>
+            <a:spcAft>
+              <a:spcPct val="35000"/>
+            </a:spcAft>
+            <a:buNone/>
+          </a:pPr>
+          <a:r>
+            <a:rPr lang="en-US" sz="1000" kern="1200" dirty="0" err="1"/>
+            <a:t>DynArr</a:t>
+          </a:r>
+          <a:r>
+            <a:rPr lang="en-US" sz="1000" kern="1200" dirty="0"/>
+            <a:t>, </a:t>
+          </a:r>
+          <a:r>
+            <a:rPr lang="en-US" sz="1000" kern="1200" dirty="0" err="1"/>
+            <a:t>DynArrAllocPM</a:t>
+          </a:r>
+          <a:r>
+            <a:rPr lang="en-US" sz="1000" kern="1200" dirty="0"/>
+            <a:t> &amp; </a:t>
+          </a:r>
+          <a:r>
+            <a:rPr lang="en-US" sz="1000" kern="1200" dirty="0" err="1"/>
+            <a:t>DynArrAlloc</a:t>
+          </a:r>
+          <a:endParaRPr lang="en-US" sz="1000" kern="1200" dirty="0"/>
+        </a:p>
+      </dsp:txBody>
+      <dsp:txXfrm>
+        <a:off x="9352818" y="21494"/>
+        <a:ext cx="944341" cy="566605"/>
       </dsp:txXfrm>
     </dsp:sp>
   </dsp:spTree>
@@ -5258,7 +5729,7 @@
       </dsp:nvSpPr>
       <dsp:spPr>
         <a:xfrm>
-          <a:off x="206970" y="294"/>
+          <a:off x="765224" y="294"/>
           <a:ext cx="1015007" cy="609004"/>
         </a:xfrm>
         <a:prstGeom prst="rect">
@@ -5328,12 +5799,12 @@
         </a:fontRef>
       </dsp:style>
       <dsp:txBody>
-        <a:bodyPr spcFirstLastPara="0" vert="horz" wrap="square" lIns="60960" tIns="60960" rIns="60960" bIns="60960" numCol="1" spcCol="1270" anchor="ctr" anchorCtr="0">
+        <a:bodyPr spcFirstLastPara="0" vert="horz" wrap="square" lIns="64770" tIns="64770" rIns="64770" bIns="64770" numCol="1" spcCol="1270" anchor="ctr" anchorCtr="0">
           <a:noAutofit/>
         </a:bodyPr>
         <a:lstStyle/>
         <a:p>
-          <a:pPr marL="0" lvl="0" indent="0" algn="ctr" defTabSz="711200">
+          <a:pPr marL="0" lvl="0" indent="0" algn="ctr" defTabSz="755650">
             <a:lnSpc>
               <a:spcPct val="90000"/>
             </a:lnSpc>
@@ -5346,13 +5817,13 @@
             <a:buNone/>
           </a:pPr>
           <a:r>
-            <a:rPr lang="en-US" sz="1600" kern="1200" dirty="0"/>
+            <a:rPr lang="en-US" sz="1700" kern="1200" dirty="0"/>
             <a:t>File I/O</a:t>
           </a:r>
         </a:p>
       </dsp:txBody>
       <dsp:txXfrm>
-        <a:off x="206970" y="294"/>
+        <a:off x="765224" y="294"/>
         <a:ext cx="1015007" cy="609004"/>
       </dsp:txXfrm>
     </dsp:sp>
@@ -5363,7 +5834,7 @@
       </dsp:nvSpPr>
       <dsp:spPr>
         <a:xfrm>
-          <a:off x="1323478" y="294"/>
+          <a:off x="1881733" y="294"/>
           <a:ext cx="1015007" cy="609004"/>
         </a:xfrm>
         <a:prstGeom prst="rect">
@@ -5433,12 +5904,12 @@
         </a:fontRef>
       </dsp:style>
       <dsp:txBody>
-        <a:bodyPr spcFirstLastPara="0" vert="horz" wrap="square" lIns="60960" tIns="60960" rIns="60960" bIns="60960" numCol="1" spcCol="1270" anchor="ctr" anchorCtr="0">
+        <a:bodyPr spcFirstLastPara="0" vert="horz" wrap="square" lIns="64770" tIns="64770" rIns="64770" bIns="64770" numCol="1" spcCol="1270" anchor="ctr" anchorCtr="0">
           <a:noAutofit/>
         </a:bodyPr>
         <a:lstStyle/>
         <a:p>
-          <a:pPr marL="0" lvl="0" indent="0" algn="ctr" defTabSz="711200">
+          <a:pPr marL="0" lvl="0" indent="0" algn="ctr" defTabSz="755650">
             <a:lnSpc>
               <a:spcPct val="90000"/>
             </a:lnSpc>
@@ -5451,13 +5922,13 @@
             <a:buNone/>
           </a:pPr>
           <a:r>
-            <a:rPr lang="en-US" sz="1600" kern="1200" dirty="0"/>
+            <a:rPr lang="en-US" sz="1700" kern="1200" dirty="0"/>
             <a:t>Platform Detection</a:t>
           </a:r>
         </a:p>
       </dsp:txBody>
       <dsp:txXfrm>
-        <a:off x="1323478" y="294"/>
+        <a:off x="1881733" y="294"/>
         <a:ext cx="1015007" cy="609004"/>
       </dsp:txXfrm>
     </dsp:sp>
@@ -5468,7 +5939,7 @@
       </dsp:nvSpPr>
       <dsp:spPr>
         <a:xfrm>
-          <a:off x="2439987" y="294"/>
+          <a:off x="2998241" y="294"/>
           <a:ext cx="1015007" cy="609004"/>
         </a:xfrm>
         <a:prstGeom prst="rect">
@@ -5538,12 +6009,12 @@
         </a:fontRef>
       </dsp:style>
       <dsp:txBody>
-        <a:bodyPr spcFirstLastPara="0" vert="horz" wrap="square" lIns="60960" tIns="60960" rIns="60960" bIns="60960" numCol="1" spcCol="1270" anchor="ctr" anchorCtr="0">
+        <a:bodyPr spcFirstLastPara="0" vert="horz" wrap="square" lIns="64770" tIns="64770" rIns="64770" bIns="64770" numCol="1" spcCol="1270" anchor="ctr" anchorCtr="0">
           <a:noAutofit/>
         </a:bodyPr>
         <a:lstStyle/>
         <a:p>
-          <a:pPr marL="0" lvl="0" indent="0" algn="ctr" defTabSz="711200">
+          <a:pPr marL="0" lvl="0" indent="0" algn="ctr" defTabSz="755650">
             <a:lnSpc>
               <a:spcPct val="90000"/>
             </a:lnSpc>
@@ -5556,13 +6027,13 @@
             <a:buNone/>
           </a:pPr>
           <a:r>
-            <a:rPr lang="en-US" sz="1600" kern="1200" dirty="0"/>
+            <a:rPr lang="en-US" sz="1700" kern="1200" dirty="0"/>
             <a:t>Graphics API</a:t>
           </a:r>
         </a:p>
       </dsp:txBody>
       <dsp:txXfrm>
-        <a:off x="2439987" y="294"/>
+        <a:off x="2998241" y="294"/>
         <a:ext cx="1015007" cy="609004"/>
       </dsp:txXfrm>
     </dsp:sp>
@@ -5573,7 +6044,7 @@
       </dsp:nvSpPr>
       <dsp:spPr>
         <a:xfrm>
-          <a:off x="3556496" y="294"/>
+          <a:off x="4114750" y="294"/>
           <a:ext cx="1015007" cy="609004"/>
         </a:xfrm>
         <a:prstGeom prst="rect">
@@ -5643,12 +6114,12 @@
         </a:fontRef>
       </dsp:style>
       <dsp:txBody>
-        <a:bodyPr spcFirstLastPara="0" vert="horz" wrap="square" lIns="60960" tIns="60960" rIns="60960" bIns="60960" numCol="1" spcCol="1270" anchor="ctr" anchorCtr="0">
+        <a:bodyPr spcFirstLastPara="0" vert="horz" wrap="square" lIns="64770" tIns="64770" rIns="64770" bIns="64770" numCol="1" spcCol="1270" anchor="ctr" anchorCtr="0">
           <a:noAutofit/>
         </a:bodyPr>
         <a:lstStyle/>
         <a:p>
-          <a:pPr marL="0" lvl="0" indent="0" algn="ctr" defTabSz="711200">
+          <a:pPr marL="0" lvl="0" indent="0" algn="ctr" defTabSz="755650">
             <a:lnSpc>
               <a:spcPct val="90000"/>
             </a:lnSpc>
@@ -5661,24 +6132,25 @@
             <a:buNone/>
           </a:pPr>
           <a:r>
-            <a:rPr lang="en-US" sz="1600" kern="1200" dirty="0"/>
+            <a:rPr lang="en-US" sz="1700" kern="1200"/>
             <a:t>Window</a:t>
           </a:r>
+          <a:endParaRPr lang="en-US" sz="1700" kern="1200" dirty="0"/>
         </a:p>
       </dsp:txBody>
       <dsp:txXfrm>
-        <a:off x="3556496" y="294"/>
+        <a:off x="4114750" y="294"/>
         <a:ext cx="1015007" cy="609004"/>
       </dsp:txXfrm>
     </dsp:sp>
-    <dsp:sp modelId="{A97B010E-89D0-431F-BDBA-7E3168873D2A}">
+    <dsp:sp modelId="{7641B0FE-5465-49ED-BA37-8824287DA745}">
       <dsp:nvSpPr>
         <dsp:cNvPr id="0" name=""/>
         <dsp:cNvSpPr/>
       </dsp:nvSpPr>
       <dsp:spPr>
         <a:xfrm>
-          <a:off x="4673004" y="294"/>
+          <a:off x="5231258" y="294"/>
           <a:ext cx="1015007" cy="609004"/>
         </a:xfrm>
         <a:prstGeom prst="rect">
@@ -5748,12 +6220,12 @@
         </a:fontRef>
       </dsp:style>
       <dsp:txBody>
-        <a:bodyPr spcFirstLastPara="0" vert="horz" wrap="square" lIns="60960" tIns="60960" rIns="60960" bIns="60960" numCol="1" spcCol="1270" anchor="ctr" anchorCtr="0">
+        <a:bodyPr spcFirstLastPara="0" vert="horz" wrap="square" lIns="64770" tIns="64770" rIns="64770" bIns="64770" numCol="1" spcCol="1270" anchor="ctr" anchorCtr="0">
           <a:noAutofit/>
         </a:bodyPr>
         <a:lstStyle/>
         <a:p>
-          <a:pPr marL="0" lvl="0" indent="0" algn="ctr" defTabSz="711200">
+          <a:pPr marL="0" lvl="0" indent="0" algn="ctr" defTabSz="755650">
             <a:lnSpc>
               <a:spcPct val="90000"/>
             </a:lnSpc>
@@ -5766,25 +6238,24 @@
             <a:buNone/>
           </a:pPr>
           <a:r>
-            <a:rPr lang="en-US" sz="1600" kern="1200" dirty="0" err="1"/>
-            <a:t>Swapchain</a:t>
+            <a:rPr lang="en-US" sz="1700" kern="1200" dirty="0"/>
+            <a:t>OS events</a:t>
           </a:r>
-          <a:endParaRPr lang="en-US" sz="1600" kern="1200" dirty="0"/>
         </a:p>
       </dsp:txBody>
       <dsp:txXfrm>
-        <a:off x="4673004" y="294"/>
+        <a:off x="5231258" y="294"/>
         <a:ext cx="1015007" cy="609004"/>
       </dsp:txXfrm>
     </dsp:sp>
-    <dsp:sp modelId="{7641B0FE-5465-49ED-BA37-8824287DA745}">
+    <dsp:sp modelId="{8DCF91ED-0B2B-4E36-B905-53C3765FC7A0}">
       <dsp:nvSpPr>
         <dsp:cNvPr id="0" name=""/>
         <dsp:cNvSpPr/>
       </dsp:nvSpPr>
       <dsp:spPr>
         <a:xfrm>
-          <a:off x="5789513" y="294"/>
+          <a:off x="6347767" y="294"/>
           <a:ext cx="1015007" cy="609004"/>
         </a:xfrm>
         <a:prstGeom prst="rect">
@@ -5854,12 +6325,12 @@
         </a:fontRef>
       </dsp:style>
       <dsp:txBody>
-        <a:bodyPr spcFirstLastPara="0" vert="horz" wrap="square" lIns="60960" tIns="60960" rIns="60960" bIns="60960" numCol="1" spcCol="1270" anchor="ctr" anchorCtr="0">
+        <a:bodyPr spcFirstLastPara="0" vert="horz" wrap="square" lIns="64770" tIns="64770" rIns="64770" bIns="64770" numCol="1" spcCol="1270" anchor="ctr" anchorCtr="0">
           <a:noAutofit/>
         </a:bodyPr>
         <a:lstStyle/>
         <a:p>
-          <a:pPr marL="0" lvl="0" indent="0" algn="ctr" defTabSz="711200">
+          <a:pPr marL="0" lvl="0" indent="0" algn="ctr" defTabSz="755650">
             <a:lnSpc>
               <a:spcPct val="90000"/>
             </a:lnSpc>
@@ -5872,118 +6343,13 @@
             <a:buNone/>
           </a:pPr>
           <a:r>
-            <a:rPr lang="en-US" sz="1600" kern="1200" dirty="0"/>
-            <a:t>OS events</a:t>
-          </a:r>
-        </a:p>
-      </dsp:txBody>
-      <dsp:txXfrm>
-        <a:off x="5789513" y="294"/>
-        <a:ext cx="1015007" cy="609004"/>
-      </dsp:txXfrm>
-    </dsp:sp>
-    <dsp:sp modelId="{8DCF91ED-0B2B-4E36-B905-53C3765FC7A0}">
-      <dsp:nvSpPr>
-        <dsp:cNvPr id="0" name=""/>
-        <dsp:cNvSpPr/>
-      </dsp:nvSpPr>
-      <dsp:spPr>
-        <a:xfrm>
-          <a:off x="6906021" y="294"/>
-          <a:ext cx="1015007" cy="609004"/>
-        </a:xfrm>
-        <a:prstGeom prst="rect">
-          <a:avLst/>
-        </a:prstGeom>
-        <a:gradFill rotWithShape="0">
-          <a:gsLst>
-            <a:gs pos="0">
-              <a:schemeClr val="accent2">
-                <a:hueOff val="0"/>
-                <a:satOff val="0"/>
-                <a:lumOff val="0"/>
-                <a:alphaOff val="0"/>
-                <a:satMod val="103000"/>
-                <a:lumMod val="102000"/>
-                <a:tint val="94000"/>
-              </a:schemeClr>
-            </a:gs>
-            <a:gs pos="50000">
-              <a:schemeClr val="accent2">
-                <a:hueOff val="0"/>
-                <a:satOff val="0"/>
-                <a:lumOff val="0"/>
-                <a:alphaOff val="0"/>
-                <a:satMod val="110000"/>
-                <a:lumMod val="100000"/>
-                <a:shade val="100000"/>
-              </a:schemeClr>
-            </a:gs>
-            <a:gs pos="100000">
-              <a:schemeClr val="accent2">
-                <a:hueOff val="0"/>
-                <a:satOff val="0"/>
-                <a:lumOff val="0"/>
-                <a:alphaOff val="0"/>
-                <a:lumMod val="99000"/>
-                <a:satMod val="120000"/>
-                <a:shade val="78000"/>
-              </a:schemeClr>
-            </a:gs>
-          </a:gsLst>
-          <a:lin ang="5400000" scaled="0"/>
-        </a:gradFill>
-        <a:ln>
-          <a:noFill/>
-        </a:ln>
-        <a:effectLst>
-          <a:outerShdw blurRad="57150" dist="19050" dir="5400000" algn="ctr" rotWithShape="0">
-            <a:srgbClr val="000000">
-              <a:alpha val="63000"/>
-            </a:srgbClr>
-          </a:outerShdw>
-        </a:effectLst>
-      </dsp:spPr>
-      <dsp:style>
-        <a:lnRef idx="0">
-          <a:scrgbClr r="0" g="0" b="0"/>
-        </a:lnRef>
-        <a:fillRef idx="3">
-          <a:scrgbClr r="0" g="0" b="0"/>
-        </a:fillRef>
-        <a:effectRef idx="3">
-          <a:scrgbClr r="0" g="0" b="0"/>
-        </a:effectRef>
-        <a:fontRef idx="minor">
-          <a:schemeClr val="lt1"/>
-        </a:fontRef>
-      </dsp:style>
-      <dsp:txBody>
-        <a:bodyPr spcFirstLastPara="0" vert="horz" wrap="square" lIns="60960" tIns="60960" rIns="60960" bIns="60960" numCol="1" spcCol="1270" anchor="ctr" anchorCtr="0">
-          <a:noAutofit/>
-        </a:bodyPr>
-        <a:lstStyle/>
-        <a:p>
-          <a:pPr marL="0" lvl="0" indent="0" algn="ctr" defTabSz="711200">
-            <a:lnSpc>
-              <a:spcPct val="90000"/>
-            </a:lnSpc>
-            <a:spcBef>
-              <a:spcPct val="0"/>
-            </a:spcBef>
-            <a:spcAft>
-              <a:spcPct val="35000"/>
-            </a:spcAft>
-            <a:buNone/>
-          </a:pPr>
-          <a:r>
-            <a:rPr lang="en-US" sz="1600" kern="1200" dirty="0"/>
+            <a:rPr lang="en-US" sz="1700" kern="1200" dirty="0"/>
             <a:t>Input polling</a:t>
           </a:r>
         </a:p>
       </dsp:txBody>
       <dsp:txXfrm>
-        <a:off x="6906021" y="294"/>
+        <a:off x="6347767" y="294"/>
         <a:ext cx="1015007" cy="609004"/>
       </dsp:txXfrm>
     </dsp:sp>
@@ -11872,7 +12238,7 @@
           <a:p>
             <a:fld id="{D0E2DD2C-27F7-4F93-96E8-CD28AD9267D9}" type="datetimeFigureOut">
               <a:rPr lang="en-US" smtClean="0"/>
-              <a:t>7/28/2025</a:t>
+              <a:t>4/5/2026</a:t>
             </a:fld>
             <a:endParaRPr lang="en-US"/>
           </a:p>
@@ -12455,7 +12821,7 @@
           <a:p>
             <a:fld id="{783DC7D5-4D76-4679-A391-31CBAFA90932}" type="datetimeFigureOut">
               <a:rPr lang="en-US" smtClean="0"/>
-              <a:t>7/28/2025</a:t>
+              <a:t>4/5/2026</a:t>
             </a:fld>
             <a:endParaRPr lang="en-US"/>
           </a:p>
@@ -12653,7 +13019,7 @@
           <a:p>
             <a:fld id="{783DC7D5-4D76-4679-A391-31CBAFA90932}" type="datetimeFigureOut">
               <a:rPr lang="en-US" smtClean="0"/>
-              <a:t>7/28/2025</a:t>
+              <a:t>4/5/2026</a:t>
             </a:fld>
             <a:endParaRPr lang="en-US"/>
           </a:p>
@@ -12861,7 +13227,7 @@
           <a:p>
             <a:fld id="{783DC7D5-4D76-4679-A391-31CBAFA90932}" type="datetimeFigureOut">
               <a:rPr lang="en-US" smtClean="0"/>
-              <a:t>7/28/2025</a:t>
+              <a:t>4/5/2026</a:t>
             </a:fld>
             <a:endParaRPr lang="en-US"/>
           </a:p>
@@ -13059,7 +13425,7 @@
           <a:p>
             <a:fld id="{783DC7D5-4D76-4679-A391-31CBAFA90932}" type="datetimeFigureOut">
               <a:rPr lang="en-US" smtClean="0"/>
-              <a:t>7/28/2025</a:t>
+              <a:t>4/5/2026</a:t>
             </a:fld>
             <a:endParaRPr lang="en-US"/>
           </a:p>
@@ -13334,7 +13700,7 @@
           <a:p>
             <a:fld id="{783DC7D5-4D76-4679-A391-31CBAFA90932}" type="datetimeFigureOut">
               <a:rPr lang="en-US" smtClean="0"/>
-              <a:t>7/28/2025</a:t>
+              <a:t>4/5/2026</a:t>
             </a:fld>
             <a:endParaRPr lang="en-US"/>
           </a:p>
@@ -13599,7 +13965,7 @@
           <a:p>
             <a:fld id="{783DC7D5-4D76-4679-A391-31CBAFA90932}" type="datetimeFigureOut">
               <a:rPr lang="en-US" smtClean="0"/>
-              <a:t>7/28/2025</a:t>
+              <a:t>4/5/2026</a:t>
             </a:fld>
             <a:endParaRPr lang="en-US"/>
           </a:p>
@@ -14011,7 +14377,7 @@
           <a:p>
             <a:fld id="{783DC7D5-4D76-4679-A391-31CBAFA90932}" type="datetimeFigureOut">
               <a:rPr lang="en-US" smtClean="0"/>
-              <a:t>7/28/2025</a:t>
+              <a:t>4/5/2026</a:t>
             </a:fld>
             <a:endParaRPr lang="en-US"/>
           </a:p>
@@ -14152,7 +14518,7 @@
           <a:p>
             <a:fld id="{783DC7D5-4D76-4679-A391-31CBAFA90932}" type="datetimeFigureOut">
               <a:rPr lang="en-US" smtClean="0"/>
-              <a:t>7/28/2025</a:t>
+              <a:t>4/5/2026</a:t>
             </a:fld>
             <a:endParaRPr lang="en-US"/>
           </a:p>
@@ -14265,7 +14631,7 @@
           <a:p>
             <a:fld id="{783DC7D5-4D76-4679-A391-31CBAFA90932}" type="datetimeFigureOut">
               <a:rPr lang="en-US" smtClean="0"/>
-              <a:t>7/28/2025</a:t>
+              <a:t>4/5/2026</a:t>
             </a:fld>
             <a:endParaRPr lang="en-US"/>
           </a:p>
@@ -14576,7 +14942,7 @@
           <a:p>
             <a:fld id="{783DC7D5-4D76-4679-A391-31CBAFA90932}" type="datetimeFigureOut">
               <a:rPr lang="en-US" smtClean="0"/>
-              <a:t>7/28/2025</a:t>
+              <a:t>4/5/2026</a:t>
             </a:fld>
             <a:endParaRPr lang="en-US"/>
           </a:p>
@@ -14864,7 +15230,7 @@
           <a:p>
             <a:fld id="{783DC7D5-4D76-4679-A391-31CBAFA90932}" type="datetimeFigureOut">
               <a:rPr lang="en-US" smtClean="0"/>
-              <a:t>7/28/2025</a:t>
+              <a:t>4/5/2026</a:t>
             </a:fld>
             <a:endParaRPr lang="en-US"/>
           </a:p>
@@ -15105,7 +15471,7 @@
           <a:p>
             <a:fld id="{783DC7D5-4D76-4679-A391-31CBAFA90932}" type="datetimeFigureOut">
               <a:rPr lang="en-US" smtClean="0"/>
-              <a:t>7/28/2025</a:t>
+              <a:t>4/5/2026</a:t>
             </a:fld>
             <a:endParaRPr lang="en-US"/>
           </a:p>
@@ -16493,14 +16859,14 @@
           <p:nvPr>
             <p:extLst>
               <p:ext uri="{D42A27DB-BD31-4B8C-83A1-F6EECF244321}">
-                <p14:modId xmlns:p14="http://schemas.microsoft.com/office/powerpoint/2010/main" val="1174808667"/>
+                <p14:modId xmlns:p14="http://schemas.microsoft.com/office/powerpoint/2010/main" val="1900427315"/>
               </p:ext>
             </p:extLst>
           </p:nvPr>
         </p:nvGraphicFramePr>
         <p:xfrm>
-          <a:off x="2032000" y="5853396"/>
-          <a:ext cx="8128000" cy="609594"/>
+          <a:off x="945502" y="5853396"/>
+          <a:ext cx="10300996" cy="609594"/>
         </p:xfrm>
         <a:graphic>
           <a:graphicData uri="http://schemas.openxmlformats.org/drawingml/2006/diagram">
@@ -16521,7 +16887,7 @@
           <p:nvPr>
             <p:extLst>
               <p:ext uri="{D42A27DB-BD31-4B8C-83A1-F6EECF244321}">
-                <p14:modId xmlns:p14="http://schemas.microsoft.com/office/powerpoint/2010/main" val="1266157099"/>
+                <p14:modId xmlns:p14="http://schemas.microsoft.com/office/powerpoint/2010/main" val="1690031728"/>
               </p:ext>
             </p:extLst>
           </p:nvPr>
@@ -16744,7 +17110,7 @@
         </p:nvSpPr>
         <p:spPr>
           <a:xfrm>
-            <a:off x="528735" y="4797491"/>
+            <a:off x="524075" y="5253134"/>
             <a:ext cx="11134530" cy="264368"/>
           </a:xfrm>
           <a:prstGeom prst="roundRect">
@@ -16772,7 +17138,7 @@
             <a:pPr algn="ctr"/>
             <a:r>
               <a:rPr lang="en-US" sz="1600" dirty="0"/>
-              <a:t>Logging</a:t>
+              <a:t>Logging, Profiling, Allocators</a:t>
             </a:r>
           </a:p>
         </p:txBody>
@@ -16791,8 +17157,8 @@
         </p:nvSpPr>
         <p:spPr>
           <a:xfrm>
-            <a:off x="845976" y="4466253"/>
-            <a:ext cx="10500048" cy="264368"/>
+            <a:off x="702906" y="4921896"/>
+            <a:ext cx="10776868" cy="264368"/>
           </a:xfrm>
           <a:prstGeom prst="roundRect">
             <a:avLst/>
@@ -16838,8 +17204,8 @@
         </p:nvSpPr>
         <p:spPr>
           <a:xfrm>
-            <a:off x="1206759" y="4135015"/>
-            <a:ext cx="9778482" cy="264368"/>
+            <a:off x="920620" y="4590658"/>
+            <a:ext cx="10341440" cy="264368"/>
           </a:xfrm>
           <a:prstGeom prst="roundRect">
             <a:avLst/>
@@ -16866,7 +17232,7 @@
             <a:pPr algn="ctr"/>
             <a:r>
               <a:rPr lang="en-US" sz="1600" dirty="0"/>
-              <a:t>Allocators</a:t>
+              <a:t>Platform</a:t>
             </a:r>
           </a:p>
         </p:txBody>
@@ -16885,8 +17251,8 @@
         </p:nvSpPr>
         <p:spPr>
           <a:xfrm>
-            <a:off x="1604867" y="3803777"/>
-            <a:ext cx="9069356" cy="264368"/>
+            <a:off x="1125894" y="4259420"/>
+            <a:ext cx="9930892" cy="264368"/>
           </a:xfrm>
           <a:prstGeom prst="roundRect">
             <a:avLst/>
@@ -16913,7 +17279,7 @@
             <a:pPr algn="ctr"/>
             <a:r>
               <a:rPr lang="en-US" sz="1600" dirty="0"/>
-              <a:t>Platform Abstraction</a:t>
+              <a:t>Render Context</a:t>
             </a:r>
           </a:p>
         </p:txBody>
@@ -16932,8 +17298,8 @@
         </p:nvSpPr>
         <p:spPr>
           <a:xfrm>
-            <a:off x="1878563" y="3472539"/>
-            <a:ext cx="8347788" cy="264368"/>
+            <a:off x="1343608" y="3928182"/>
+            <a:ext cx="9495464" cy="264368"/>
           </a:xfrm>
           <a:prstGeom prst="roundRect">
             <a:avLst/>
@@ -16960,7 +17326,7 @@
             <a:pPr algn="ctr"/>
             <a:r>
               <a:rPr lang="en-US" sz="1600" dirty="0"/>
-              <a:t>Rendering, Window</a:t>
+              <a:t>Window</a:t>
             </a:r>
           </a:p>
         </p:txBody>
@@ -16979,8 +17345,8 @@
         </p:nvSpPr>
         <p:spPr>
           <a:xfrm>
-            <a:off x="2251788" y="3141301"/>
-            <a:ext cx="7688424" cy="264368"/>
+            <a:off x="1561322" y="3596944"/>
+            <a:ext cx="9060036" cy="264368"/>
           </a:xfrm>
           <a:prstGeom prst="roundRect">
             <a:avLst/>
@@ -17007,7 +17373,7 @@
             <a:pPr algn="ctr"/>
             <a:r>
               <a:rPr lang="en-US" sz="1600" dirty="0"/>
-              <a:t>Types Registries</a:t>
+              <a:t>Renderer</a:t>
             </a:r>
           </a:p>
         </p:txBody>
@@ -17026,8 +17392,8 @@
         </p:nvSpPr>
         <p:spPr>
           <a:xfrm>
-            <a:off x="2556588" y="2810063"/>
-            <a:ext cx="7078824" cy="264368"/>
+            <a:off x="1785257" y="3265706"/>
+            <a:ext cx="8621486" cy="264368"/>
           </a:xfrm>
           <a:prstGeom prst="roundRect">
             <a:avLst/>
@@ -17054,7 +17420,7 @@
             <a:pPr algn="ctr"/>
             <a:r>
               <a:rPr lang="en-US" sz="1600" dirty="0"/>
-              <a:t>Asset Manager</a:t>
+              <a:t>Types Registries</a:t>
             </a:r>
           </a:p>
         </p:txBody>
@@ -17073,8 +17439,8 @@
         </p:nvSpPr>
         <p:spPr>
           <a:xfrm>
-            <a:off x="2892490" y="2475722"/>
-            <a:ext cx="6407020" cy="264368"/>
+            <a:off x="2009192" y="2928262"/>
+            <a:ext cx="8164296" cy="264368"/>
           </a:xfrm>
           <a:prstGeom prst="roundRect">
             <a:avLst/>
@@ -17089,6 +17455,53 @@
           </a:fillRef>
           <a:effectRef idx="1">
             <a:schemeClr val="dk1"/>
+          </a:effectRef>
+          <a:fontRef idx="minor">
+            <a:schemeClr val="dk1"/>
+          </a:fontRef>
+        </p:style>
+        <p:txBody>
+          <a:bodyPr rtlCol="0" anchor="ctr"/>
+          <a:lstStyle/>
+          <a:p>
+            <a:pPr algn="ctr"/>
+            <a:r>
+              <a:rPr lang="en-US" sz="1600" dirty="0"/>
+              <a:t>Asset Manager</a:t>
+            </a:r>
+          </a:p>
+        </p:txBody>
+      </p:sp>
+      <p:sp>
+        <p:nvSpPr>
+          <p:cNvPr id="20" name="Prostokąt: zaokrąglone rogi 19">
+            <a:extLst>
+              <a:ext uri="{FF2B5EF4-FFF2-40B4-BE49-F238E27FC236}">
+                <a16:creationId xmlns:a16="http://schemas.microsoft.com/office/drawing/2014/main" id="{20E52509-5065-0B09-82D5-A1A08DD23DF2}"/>
+              </a:ext>
+            </a:extLst>
+          </p:cNvPr>
+          <p:cNvSpPr/>
+          <p:nvPr/>
+        </p:nvSpPr>
+        <p:spPr>
+          <a:xfrm>
+            <a:off x="2220686" y="2593922"/>
+            <a:ext cx="7731974" cy="264368"/>
+          </a:xfrm>
+          <a:prstGeom prst="roundRect">
+            <a:avLst/>
+          </a:prstGeom>
+        </p:spPr>
+        <p:style>
+          <a:lnRef idx="1">
+            <a:schemeClr val="accent1"/>
+          </a:lnRef>
+          <a:fillRef idx="2">
+            <a:schemeClr val="accent1"/>
+          </a:fillRef>
+          <a:effectRef idx="1">
+            <a:schemeClr val="accent1"/>
           </a:effectRef>
           <a:fontRef idx="minor">
             <a:schemeClr val="dk1"/>
@@ -17124,10 +17537,10 @@
       </p:sp>
       <p:sp>
         <p:nvSpPr>
-          <p:cNvPr id="20" name="Prostokąt: zaokrąglone rogi 19">
+          <p:cNvPr id="22" name="Prostokąt: zaokrąglone rogi 21">
             <a:extLst>
               <a:ext uri="{FF2B5EF4-FFF2-40B4-BE49-F238E27FC236}">
-                <a16:creationId xmlns:a16="http://schemas.microsoft.com/office/drawing/2014/main" id="{20E52509-5065-0B09-82D5-A1A08DD23DF2}"/>
+                <a16:creationId xmlns:a16="http://schemas.microsoft.com/office/drawing/2014/main" id="{50D6541F-FA5D-A66C-CB04-00D158D44322}"/>
               </a:ext>
             </a:extLst>
           </p:cNvPr>
@@ -17136,55 +17549,8 @@
         </p:nvSpPr>
         <p:spPr>
           <a:xfrm>
-            <a:off x="3147526" y="2141381"/>
-            <a:ext cx="5809862" cy="264368"/>
-          </a:xfrm>
-          <a:prstGeom prst="roundRect">
-            <a:avLst/>
-          </a:prstGeom>
-        </p:spPr>
-        <p:style>
-          <a:lnRef idx="1">
-            <a:schemeClr val="accent1"/>
-          </a:lnRef>
-          <a:fillRef idx="2">
-            <a:schemeClr val="accent1"/>
-          </a:fillRef>
-          <a:effectRef idx="1">
-            <a:schemeClr val="accent1"/>
-          </a:effectRef>
-          <a:fontRef idx="minor">
-            <a:schemeClr val="dk1"/>
-          </a:fontRef>
-        </p:style>
-        <p:txBody>
-          <a:bodyPr rtlCol="0" anchor="ctr"/>
-          <a:lstStyle/>
-          <a:p>
-            <a:pPr algn="ctr"/>
-            <a:r>
-              <a:rPr lang="en-US" sz="1600" dirty="0"/>
-              <a:t>Client Application</a:t>
-            </a:r>
-          </a:p>
-        </p:txBody>
-      </p:sp>
-      <p:sp>
-        <p:nvSpPr>
-          <p:cNvPr id="21" name="Prostokąt: zaokrąglone rogi 20">
-            <a:extLst>
-              <a:ext uri="{FF2B5EF4-FFF2-40B4-BE49-F238E27FC236}">
-                <a16:creationId xmlns:a16="http://schemas.microsoft.com/office/drawing/2014/main" id="{8C93D661-EC4A-8C2E-E138-FEE3936D8388}"/>
-              </a:ext>
-            </a:extLst>
-          </p:cNvPr>
-          <p:cNvSpPr/>
-          <p:nvPr/>
-        </p:nvSpPr>
-        <p:spPr>
-          <a:xfrm>
-            <a:off x="3502086" y="1807040"/>
-            <a:ext cx="2469503" cy="264368"/>
+            <a:off x="2444620" y="2262683"/>
+            <a:ext cx="7284106" cy="264368"/>
           </a:xfrm>
           <a:prstGeom prst="roundRect">
             <a:avLst/>
@@ -17211,54 +17577,7 @@
             <a:pPr algn="ctr"/>
             <a:r>
               <a:rPr lang="en-US" sz="1600" dirty="0"/>
-              <a:t>Project Loading/Creation</a:t>
-            </a:r>
-          </a:p>
-        </p:txBody>
-      </p:sp>
-      <p:sp>
-        <p:nvSpPr>
-          <p:cNvPr id="22" name="Prostokąt: zaokrąglone rogi 21">
-            <a:extLst>
-              <a:ext uri="{FF2B5EF4-FFF2-40B4-BE49-F238E27FC236}">
-                <a16:creationId xmlns:a16="http://schemas.microsoft.com/office/drawing/2014/main" id="{50D6541F-FA5D-A66C-CB04-00D158D44322}"/>
-              </a:ext>
-            </a:extLst>
-          </p:cNvPr>
-          <p:cNvSpPr/>
-          <p:nvPr/>
-        </p:nvSpPr>
-        <p:spPr>
-          <a:xfrm>
-            <a:off x="6220412" y="1807040"/>
-            <a:ext cx="2469503" cy="264368"/>
-          </a:xfrm>
-          <a:prstGeom prst="roundRect">
-            <a:avLst/>
-          </a:prstGeom>
-        </p:spPr>
-        <p:style>
-          <a:lnRef idx="1">
-            <a:schemeClr val="accent2"/>
-          </a:lnRef>
-          <a:fillRef idx="2">
-            <a:schemeClr val="accent2"/>
-          </a:fillRef>
-          <a:effectRef idx="1">
-            <a:schemeClr val="accent2"/>
-          </a:effectRef>
-          <a:fontRef idx="minor">
-            <a:schemeClr val="dk1"/>
-          </a:fontRef>
-        </p:style>
-        <p:txBody>
-          <a:bodyPr rtlCol="0" anchor="ctr"/>
-          <a:lstStyle/>
-          <a:p>
-            <a:pPr algn="ctr"/>
-            <a:r>
-              <a:rPr lang="en-US" sz="1600" dirty="0"/>
-              <a:t>Runtime</a:t>
+              <a:t>Client Application</a:t>
             </a:r>
           </a:p>
         </p:txBody>
@@ -17277,7 +17596,7 @@
         </p:nvCxnSpPr>
         <p:spPr>
           <a:xfrm>
-            <a:off x="3449220" y="5996474"/>
+            <a:off x="3449220" y="5941654"/>
             <a:ext cx="5542384" cy="0"/>
           </a:xfrm>
           <a:prstGeom prst="straightConnector1">
@@ -17341,6 +17660,100 @@
                 </a:solidFill>
               </a:rPr>
               <a:t>Time</a:t>
+            </a:r>
+          </a:p>
+        </p:txBody>
+      </p:sp>
+      <p:sp>
+        <p:nvSpPr>
+          <p:cNvPr id="2" name="Prostokąt: zaokrąglone rogi 1">
+            <a:extLst>
+              <a:ext uri="{FF2B5EF4-FFF2-40B4-BE49-F238E27FC236}">
+                <a16:creationId xmlns:a16="http://schemas.microsoft.com/office/drawing/2014/main" id="{7AF1F8FC-7548-D9F0-980C-A86F63D9E223}"/>
+              </a:ext>
+            </a:extLst>
+          </p:cNvPr>
+          <p:cNvSpPr/>
+          <p:nvPr/>
+        </p:nvSpPr>
+        <p:spPr>
+          <a:xfrm>
+            <a:off x="6207966" y="1925239"/>
+            <a:ext cx="3289036" cy="264368"/>
+          </a:xfrm>
+          <a:prstGeom prst="roundRect">
+            <a:avLst/>
+          </a:prstGeom>
+        </p:spPr>
+        <p:style>
+          <a:lnRef idx="1">
+            <a:schemeClr val="accent3"/>
+          </a:lnRef>
+          <a:fillRef idx="2">
+            <a:schemeClr val="accent3"/>
+          </a:fillRef>
+          <a:effectRef idx="1">
+            <a:schemeClr val="accent3"/>
+          </a:effectRef>
+          <a:fontRef idx="minor">
+            <a:schemeClr val="dk1"/>
+          </a:fontRef>
+        </p:style>
+        <p:txBody>
+          <a:bodyPr rtlCol="0" anchor="ctr"/>
+          <a:lstStyle/>
+          <a:p>
+            <a:pPr algn="ctr"/>
+            <a:r>
+              <a:rPr lang="en-US" sz="1600" dirty="0"/>
+              <a:t>Runtime</a:t>
+            </a:r>
+          </a:p>
+        </p:txBody>
+      </p:sp>
+      <p:sp>
+        <p:nvSpPr>
+          <p:cNvPr id="7" name="Prostokąt: zaokrąglone rogi 6">
+            <a:extLst>
+              <a:ext uri="{FF2B5EF4-FFF2-40B4-BE49-F238E27FC236}">
+                <a16:creationId xmlns:a16="http://schemas.microsoft.com/office/drawing/2014/main" id="{F82BCBF4-23E5-A7C8-03D8-B1EAFD357D85}"/>
+              </a:ext>
+            </a:extLst>
+          </p:cNvPr>
+          <p:cNvSpPr/>
+          <p:nvPr/>
+        </p:nvSpPr>
+        <p:spPr>
+          <a:xfrm>
+            <a:off x="2694997" y="1923894"/>
+            <a:ext cx="3289036" cy="264368"/>
+          </a:xfrm>
+          <a:prstGeom prst="roundRect">
+            <a:avLst/>
+          </a:prstGeom>
+        </p:spPr>
+        <p:style>
+          <a:lnRef idx="1">
+            <a:schemeClr val="accent3"/>
+          </a:lnRef>
+          <a:fillRef idx="2">
+            <a:schemeClr val="accent3"/>
+          </a:fillRef>
+          <a:effectRef idx="1">
+            <a:schemeClr val="accent3"/>
+          </a:effectRef>
+          <a:fontRef idx="minor">
+            <a:schemeClr val="dk1"/>
+          </a:fontRef>
+        </p:style>
+        <p:txBody>
+          <a:bodyPr rtlCol="0" anchor="ctr"/>
+          <a:lstStyle/>
+          <a:p>
+            <a:pPr algn="ctr"/>
+            <a:r>
+              <a:rPr lang="en-US" sz="1600" dirty="0"/>
+              <a:t>Project Loading/Creation</a:t>
             </a:r>
           </a:p>
         </p:txBody>
